--- a/quantum-threat-bitcoin-bushbash.pptx
+++ b/quantum-threat-bitcoin-bushbash.pptx
@@ -30,6 +30,16 @@
     <p:sldId id="278" r:id="rId30"/>
     <p:sldId id="279" r:id="rId31"/>
     <p:sldId id="280" r:id="rId32"/>
+    <p:sldId id="281" r:id="rId33"/>
+    <p:sldId id="282" r:id="rId34"/>
+    <p:sldId id="283" r:id="rId35"/>
+    <p:sldId id="284" r:id="rId36"/>
+    <p:sldId id="285" r:id="rId37"/>
+    <p:sldId id="286" r:id="rId38"/>
+    <p:sldId id="287" r:id="rId39"/>
+    <p:sldId id="288" r:id="rId40"/>
+    <p:sldId id="289" r:id="rId41"/>
+    <p:sldId id="290" r:id="rId42"/>
   </p:sldIdLst>
   <p:sldSz cx="12191695" cy="6858000" type="screen4x3"/>
   <p:notesSz cx="6858000" cy="9144000"/>
@@ -1794,11 +1804,7 @@
         <p:txBody>
           <a:bodyPr/>
           <a:lstStyle/>
-          <a:p>
-            <a:r>
-              <a:t>All major sources listed with URLs.</a:t>
-            </a:r>
-          </a:p>
+          <a:p/>
         </p:txBody>
       </p:sp>
       <p:sp>
@@ -1864,16 +1870,271 @@
         <p:txBody>
           <a:bodyPr/>
           <a:lstStyle/>
-          <a:p>
-            <a:r>
-              <a:t>Close with priorities. Invite involvement.</a:t>
-            </a:r>
-          </a:p>
-          <a:p>
-            <a:r>
-              <a:t>Key question: what ships early without fragmenting consensus?</a:t>
-            </a:r>
-          </a:p>
+          <a:p/>
+        </p:txBody>
+      </p:sp>
+      <p:sp>
+        <p:nvSpPr>
+          <p:cNvPr id="4" name="Slide Number Placeholder 3"/>
+          <p:cNvSpPr>
+            <a:spLocks noGrp="1"/>
+          </p:cNvSpPr>
+          <p:nvPr>
+            <p:ph type="sldNum" idx="5" sz="quarter"/>
+          </p:nvPr>
+        </p:nvSpPr>
+        <p:spPr/>
+      </p:sp>
+    </p:spTree>
+  </p:cSld>
+  <p:clrMapOvr>
+    <a:masterClrMapping/>
+  </p:clrMapOvr>
+</p:notes>
+</file>
+
+<file path=ppt/notesSlides/notesSlide26.xml><?xml version="1.0" encoding="utf-8"?>
+<p:notes xmlns:a="http://schemas.openxmlformats.org/drawingml/2006/main" xmlns:p="http://schemas.openxmlformats.org/presentationml/2006/main" xmlns:r="http://schemas.openxmlformats.org/officeDocument/2006/relationships">
+  <p:cSld>
+    <p:spTree>
+      <p:nvGrpSpPr>
+        <p:cNvPr id="1" name=""/>
+        <p:cNvGrpSpPr/>
+        <p:nvPr/>
+      </p:nvGrpSpPr>
+      <p:grpSpPr>
+        <a:xfrm>
+          <a:off x="0" y="0"/>
+          <a:ext cx="0" cy="0"/>
+          <a:chOff x="0" y="0"/>
+          <a:chExt cx="0" cy="0"/>
+        </a:xfrm>
+      </p:grpSpPr>
+      <p:sp>
+        <p:nvSpPr>
+          <p:cNvPr id="2" name="Slide Image Placeholder 1"/>
+          <p:cNvSpPr>
+            <a:spLocks noGrp="1"/>
+          </p:cNvSpPr>
+          <p:nvPr>
+            <p:ph type="sldImg" idx="2"/>
+          </p:nvPr>
+        </p:nvSpPr>
+        <p:spPr/>
+      </p:sp>
+      <p:sp>
+        <p:nvSpPr>
+          <p:cNvPr id="3" name="Notes Placeholder 2"/>
+          <p:cNvSpPr>
+            <a:spLocks noGrp="1"/>
+          </p:cNvSpPr>
+          <p:nvPr>
+            <p:ph type="body" idx="3" sz="quarter"/>
+          </p:nvPr>
+        </p:nvSpPr>
+        <p:spPr/>
+        <p:txBody>
+          <a:bodyPr/>
+          <a:lstStyle/>
+          <a:p/>
+        </p:txBody>
+      </p:sp>
+      <p:sp>
+        <p:nvSpPr>
+          <p:cNvPr id="4" name="Slide Number Placeholder 3"/>
+          <p:cNvSpPr>
+            <a:spLocks noGrp="1"/>
+          </p:cNvSpPr>
+          <p:nvPr>
+            <p:ph type="sldNum" idx="5" sz="quarter"/>
+          </p:nvPr>
+        </p:nvSpPr>
+        <p:spPr/>
+      </p:sp>
+    </p:spTree>
+  </p:cSld>
+  <p:clrMapOvr>
+    <a:masterClrMapping/>
+  </p:clrMapOvr>
+</p:notes>
+</file>
+
+<file path=ppt/notesSlides/notesSlide27.xml><?xml version="1.0" encoding="utf-8"?>
+<p:notes xmlns:a="http://schemas.openxmlformats.org/drawingml/2006/main" xmlns:p="http://schemas.openxmlformats.org/presentationml/2006/main" xmlns:r="http://schemas.openxmlformats.org/officeDocument/2006/relationships">
+  <p:cSld>
+    <p:spTree>
+      <p:nvGrpSpPr>
+        <p:cNvPr id="1" name=""/>
+        <p:cNvGrpSpPr/>
+        <p:nvPr/>
+      </p:nvGrpSpPr>
+      <p:grpSpPr>
+        <a:xfrm>
+          <a:off x="0" y="0"/>
+          <a:ext cx="0" cy="0"/>
+          <a:chOff x="0" y="0"/>
+          <a:chExt cx="0" cy="0"/>
+        </a:xfrm>
+      </p:grpSpPr>
+      <p:sp>
+        <p:nvSpPr>
+          <p:cNvPr id="2" name="Slide Image Placeholder 1"/>
+          <p:cNvSpPr>
+            <a:spLocks noGrp="1"/>
+          </p:cNvSpPr>
+          <p:nvPr>
+            <p:ph type="sldImg" idx="2"/>
+          </p:nvPr>
+        </p:nvSpPr>
+        <p:spPr/>
+      </p:sp>
+      <p:sp>
+        <p:nvSpPr>
+          <p:cNvPr id="3" name="Notes Placeholder 2"/>
+          <p:cNvSpPr>
+            <a:spLocks noGrp="1"/>
+          </p:cNvSpPr>
+          <p:nvPr>
+            <p:ph type="body" idx="3" sz="quarter"/>
+          </p:nvPr>
+        </p:nvSpPr>
+        <p:spPr/>
+        <p:txBody>
+          <a:bodyPr/>
+          <a:lstStyle/>
+          <a:p/>
+        </p:txBody>
+      </p:sp>
+      <p:sp>
+        <p:nvSpPr>
+          <p:cNvPr id="4" name="Slide Number Placeholder 3"/>
+          <p:cNvSpPr>
+            <a:spLocks noGrp="1"/>
+          </p:cNvSpPr>
+          <p:nvPr>
+            <p:ph type="sldNum" idx="5" sz="quarter"/>
+          </p:nvPr>
+        </p:nvSpPr>
+        <p:spPr/>
+      </p:sp>
+    </p:spTree>
+  </p:cSld>
+  <p:clrMapOvr>
+    <a:masterClrMapping/>
+  </p:clrMapOvr>
+</p:notes>
+</file>
+
+<file path=ppt/notesSlides/notesSlide28.xml><?xml version="1.0" encoding="utf-8"?>
+<p:notes xmlns:a="http://schemas.openxmlformats.org/drawingml/2006/main" xmlns:p="http://schemas.openxmlformats.org/presentationml/2006/main" xmlns:r="http://schemas.openxmlformats.org/officeDocument/2006/relationships">
+  <p:cSld>
+    <p:spTree>
+      <p:nvGrpSpPr>
+        <p:cNvPr id="1" name=""/>
+        <p:cNvGrpSpPr/>
+        <p:nvPr/>
+      </p:nvGrpSpPr>
+      <p:grpSpPr>
+        <a:xfrm>
+          <a:off x="0" y="0"/>
+          <a:ext cx="0" cy="0"/>
+          <a:chOff x="0" y="0"/>
+          <a:chExt cx="0" cy="0"/>
+        </a:xfrm>
+      </p:grpSpPr>
+      <p:sp>
+        <p:nvSpPr>
+          <p:cNvPr id="2" name="Slide Image Placeholder 1"/>
+          <p:cNvSpPr>
+            <a:spLocks noGrp="1"/>
+          </p:cNvSpPr>
+          <p:nvPr>
+            <p:ph type="sldImg" idx="2"/>
+          </p:nvPr>
+        </p:nvSpPr>
+        <p:spPr/>
+      </p:sp>
+      <p:sp>
+        <p:nvSpPr>
+          <p:cNvPr id="3" name="Notes Placeholder 2"/>
+          <p:cNvSpPr>
+            <a:spLocks noGrp="1"/>
+          </p:cNvSpPr>
+          <p:nvPr>
+            <p:ph type="body" idx="3" sz="quarter"/>
+          </p:nvPr>
+        </p:nvSpPr>
+        <p:spPr/>
+        <p:txBody>
+          <a:bodyPr/>
+          <a:lstStyle/>
+          <a:p/>
+        </p:txBody>
+      </p:sp>
+      <p:sp>
+        <p:nvSpPr>
+          <p:cNvPr id="4" name="Slide Number Placeholder 3"/>
+          <p:cNvSpPr>
+            <a:spLocks noGrp="1"/>
+          </p:cNvSpPr>
+          <p:nvPr>
+            <p:ph type="sldNum" idx="5" sz="quarter"/>
+          </p:nvPr>
+        </p:nvSpPr>
+        <p:spPr/>
+      </p:sp>
+    </p:spTree>
+  </p:cSld>
+  <p:clrMapOvr>
+    <a:masterClrMapping/>
+  </p:clrMapOvr>
+</p:notes>
+</file>
+
+<file path=ppt/notesSlides/notesSlide29.xml><?xml version="1.0" encoding="utf-8"?>
+<p:notes xmlns:a="http://schemas.openxmlformats.org/drawingml/2006/main" xmlns:p="http://schemas.openxmlformats.org/presentationml/2006/main" xmlns:r="http://schemas.openxmlformats.org/officeDocument/2006/relationships">
+  <p:cSld>
+    <p:spTree>
+      <p:nvGrpSpPr>
+        <p:cNvPr id="1" name=""/>
+        <p:cNvGrpSpPr/>
+        <p:nvPr/>
+      </p:nvGrpSpPr>
+      <p:grpSpPr>
+        <a:xfrm>
+          <a:off x="0" y="0"/>
+          <a:ext cx="0" cy="0"/>
+          <a:chOff x="0" y="0"/>
+          <a:chExt cx="0" cy="0"/>
+        </a:xfrm>
+      </p:grpSpPr>
+      <p:sp>
+        <p:nvSpPr>
+          <p:cNvPr id="2" name="Slide Image Placeholder 1"/>
+          <p:cNvSpPr>
+            <a:spLocks noGrp="1"/>
+          </p:cNvSpPr>
+          <p:nvPr>
+            <p:ph type="sldImg" idx="2"/>
+          </p:nvPr>
+        </p:nvSpPr>
+        <p:spPr/>
+      </p:sp>
+      <p:sp>
+        <p:nvSpPr>
+          <p:cNvPr id="3" name="Notes Placeholder 2"/>
+          <p:cNvSpPr>
+            <a:spLocks noGrp="1"/>
+          </p:cNvSpPr>
+          <p:nvPr>
+            <p:ph type="body" idx="3" sz="quarter"/>
+          </p:nvPr>
+        </p:nvSpPr>
+        <p:spPr/>
+        <p:txBody>
+          <a:bodyPr/>
+          <a:lstStyle/>
+          <a:p/>
         </p:txBody>
       </p:sp>
       <p:sp>
@@ -1947,6 +2208,411 @@
           <a:p>
             <a:r>
               <a:t>Current largest factored number by QC is 15. Far away, but trajectory matters.</a:t>
+            </a:r>
+          </a:p>
+        </p:txBody>
+      </p:sp>
+      <p:sp>
+        <p:nvSpPr>
+          <p:cNvPr id="4" name="Slide Number Placeholder 3"/>
+          <p:cNvSpPr>
+            <a:spLocks noGrp="1"/>
+          </p:cNvSpPr>
+          <p:nvPr>
+            <p:ph type="sldNum" idx="5" sz="quarter"/>
+          </p:nvPr>
+        </p:nvSpPr>
+        <p:spPr/>
+      </p:sp>
+    </p:spTree>
+  </p:cSld>
+  <p:clrMapOvr>
+    <a:masterClrMapping/>
+  </p:clrMapOvr>
+</p:notes>
+</file>
+
+<file path=ppt/notesSlides/notesSlide30.xml><?xml version="1.0" encoding="utf-8"?>
+<p:notes xmlns:a="http://schemas.openxmlformats.org/drawingml/2006/main" xmlns:p="http://schemas.openxmlformats.org/presentationml/2006/main" xmlns:r="http://schemas.openxmlformats.org/officeDocument/2006/relationships">
+  <p:cSld>
+    <p:spTree>
+      <p:nvGrpSpPr>
+        <p:cNvPr id="1" name=""/>
+        <p:cNvGrpSpPr/>
+        <p:nvPr/>
+      </p:nvGrpSpPr>
+      <p:grpSpPr>
+        <a:xfrm>
+          <a:off x="0" y="0"/>
+          <a:ext cx="0" cy="0"/>
+          <a:chOff x="0" y="0"/>
+          <a:chExt cx="0" cy="0"/>
+        </a:xfrm>
+      </p:grpSpPr>
+      <p:sp>
+        <p:nvSpPr>
+          <p:cNvPr id="2" name="Slide Image Placeholder 1"/>
+          <p:cNvSpPr>
+            <a:spLocks noGrp="1"/>
+          </p:cNvSpPr>
+          <p:nvPr>
+            <p:ph type="sldImg" idx="2"/>
+          </p:nvPr>
+        </p:nvSpPr>
+        <p:spPr/>
+      </p:sp>
+      <p:sp>
+        <p:nvSpPr>
+          <p:cNvPr id="3" name="Notes Placeholder 2"/>
+          <p:cNvSpPr>
+            <a:spLocks noGrp="1"/>
+          </p:cNvSpPr>
+          <p:nvPr>
+            <p:ph type="body" idx="3" sz="quarter"/>
+          </p:nvPr>
+        </p:nvSpPr>
+        <p:spPr/>
+        <p:txBody>
+          <a:bodyPr/>
+          <a:lstStyle/>
+          <a:p/>
+        </p:txBody>
+      </p:sp>
+      <p:sp>
+        <p:nvSpPr>
+          <p:cNvPr id="4" name="Slide Number Placeholder 3"/>
+          <p:cNvSpPr>
+            <a:spLocks noGrp="1"/>
+          </p:cNvSpPr>
+          <p:nvPr>
+            <p:ph type="sldNum" idx="5" sz="quarter"/>
+          </p:nvPr>
+        </p:nvSpPr>
+        <p:spPr/>
+      </p:sp>
+    </p:spTree>
+  </p:cSld>
+  <p:clrMapOvr>
+    <a:masterClrMapping/>
+  </p:clrMapOvr>
+</p:notes>
+</file>
+
+<file path=ppt/notesSlides/notesSlide31.xml><?xml version="1.0" encoding="utf-8"?>
+<p:notes xmlns:a="http://schemas.openxmlformats.org/drawingml/2006/main" xmlns:p="http://schemas.openxmlformats.org/presentationml/2006/main" xmlns:r="http://schemas.openxmlformats.org/officeDocument/2006/relationships">
+  <p:cSld>
+    <p:spTree>
+      <p:nvGrpSpPr>
+        <p:cNvPr id="1" name=""/>
+        <p:cNvGrpSpPr/>
+        <p:nvPr/>
+      </p:nvGrpSpPr>
+      <p:grpSpPr>
+        <a:xfrm>
+          <a:off x="0" y="0"/>
+          <a:ext cx="0" cy="0"/>
+          <a:chOff x="0" y="0"/>
+          <a:chExt cx="0" cy="0"/>
+        </a:xfrm>
+      </p:grpSpPr>
+      <p:sp>
+        <p:nvSpPr>
+          <p:cNvPr id="2" name="Slide Image Placeholder 1"/>
+          <p:cNvSpPr>
+            <a:spLocks noGrp="1"/>
+          </p:cNvSpPr>
+          <p:nvPr>
+            <p:ph type="sldImg" idx="2"/>
+          </p:nvPr>
+        </p:nvSpPr>
+        <p:spPr/>
+      </p:sp>
+      <p:sp>
+        <p:nvSpPr>
+          <p:cNvPr id="3" name="Notes Placeholder 2"/>
+          <p:cNvSpPr>
+            <a:spLocks noGrp="1"/>
+          </p:cNvSpPr>
+          <p:nvPr>
+            <p:ph type="body" idx="3" sz="quarter"/>
+          </p:nvPr>
+        </p:nvSpPr>
+        <p:spPr/>
+        <p:txBody>
+          <a:bodyPr/>
+          <a:lstStyle/>
+          <a:p/>
+        </p:txBody>
+      </p:sp>
+      <p:sp>
+        <p:nvSpPr>
+          <p:cNvPr id="4" name="Slide Number Placeholder 3"/>
+          <p:cNvSpPr>
+            <a:spLocks noGrp="1"/>
+          </p:cNvSpPr>
+          <p:nvPr>
+            <p:ph type="sldNum" idx="5" sz="quarter"/>
+          </p:nvPr>
+        </p:nvSpPr>
+        <p:spPr/>
+      </p:sp>
+    </p:spTree>
+  </p:cSld>
+  <p:clrMapOvr>
+    <a:masterClrMapping/>
+  </p:clrMapOvr>
+</p:notes>
+</file>
+
+<file path=ppt/notesSlides/notesSlide32.xml><?xml version="1.0" encoding="utf-8"?>
+<p:notes xmlns:a="http://schemas.openxmlformats.org/drawingml/2006/main" xmlns:p="http://schemas.openxmlformats.org/presentationml/2006/main" xmlns:r="http://schemas.openxmlformats.org/officeDocument/2006/relationships">
+  <p:cSld>
+    <p:spTree>
+      <p:nvGrpSpPr>
+        <p:cNvPr id="1" name=""/>
+        <p:cNvGrpSpPr/>
+        <p:nvPr/>
+      </p:nvGrpSpPr>
+      <p:grpSpPr>
+        <a:xfrm>
+          <a:off x="0" y="0"/>
+          <a:ext cx="0" cy="0"/>
+          <a:chOff x="0" y="0"/>
+          <a:chExt cx="0" cy="0"/>
+        </a:xfrm>
+      </p:grpSpPr>
+      <p:sp>
+        <p:nvSpPr>
+          <p:cNvPr id="2" name="Slide Image Placeholder 1"/>
+          <p:cNvSpPr>
+            <a:spLocks noGrp="1"/>
+          </p:cNvSpPr>
+          <p:nvPr>
+            <p:ph type="sldImg" idx="2"/>
+          </p:nvPr>
+        </p:nvSpPr>
+        <p:spPr/>
+      </p:sp>
+      <p:sp>
+        <p:nvSpPr>
+          <p:cNvPr id="3" name="Notes Placeholder 2"/>
+          <p:cNvSpPr>
+            <a:spLocks noGrp="1"/>
+          </p:cNvSpPr>
+          <p:nvPr>
+            <p:ph type="body" idx="3" sz="quarter"/>
+          </p:nvPr>
+        </p:nvSpPr>
+        <p:spPr/>
+        <p:txBody>
+          <a:bodyPr/>
+          <a:lstStyle/>
+          <a:p/>
+        </p:txBody>
+      </p:sp>
+      <p:sp>
+        <p:nvSpPr>
+          <p:cNvPr id="4" name="Slide Number Placeholder 3"/>
+          <p:cNvSpPr>
+            <a:spLocks noGrp="1"/>
+          </p:cNvSpPr>
+          <p:nvPr>
+            <p:ph type="sldNum" idx="5" sz="quarter"/>
+          </p:nvPr>
+        </p:nvSpPr>
+        <p:spPr/>
+      </p:sp>
+    </p:spTree>
+  </p:cSld>
+  <p:clrMapOvr>
+    <a:masterClrMapping/>
+  </p:clrMapOvr>
+</p:notes>
+</file>
+
+<file path=ppt/notesSlides/notesSlide33.xml><?xml version="1.0" encoding="utf-8"?>
+<p:notes xmlns:a="http://schemas.openxmlformats.org/drawingml/2006/main" xmlns:p="http://schemas.openxmlformats.org/presentationml/2006/main" xmlns:r="http://schemas.openxmlformats.org/officeDocument/2006/relationships">
+  <p:cSld>
+    <p:spTree>
+      <p:nvGrpSpPr>
+        <p:cNvPr id="1" name=""/>
+        <p:cNvGrpSpPr/>
+        <p:nvPr/>
+      </p:nvGrpSpPr>
+      <p:grpSpPr>
+        <a:xfrm>
+          <a:off x="0" y="0"/>
+          <a:ext cx="0" cy="0"/>
+          <a:chOff x="0" y="0"/>
+          <a:chExt cx="0" cy="0"/>
+        </a:xfrm>
+      </p:grpSpPr>
+      <p:sp>
+        <p:nvSpPr>
+          <p:cNvPr id="2" name="Slide Image Placeholder 1"/>
+          <p:cNvSpPr>
+            <a:spLocks noGrp="1"/>
+          </p:cNvSpPr>
+          <p:nvPr>
+            <p:ph type="sldImg" idx="2"/>
+          </p:nvPr>
+        </p:nvSpPr>
+        <p:spPr/>
+      </p:sp>
+      <p:sp>
+        <p:nvSpPr>
+          <p:cNvPr id="3" name="Notes Placeholder 2"/>
+          <p:cNvSpPr>
+            <a:spLocks noGrp="1"/>
+          </p:cNvSpPr>
+          <p:nvPr>
+            <p:ph type="body" idx="3" sz="quarter"/>
+          </p:nvPr>
+        </p:nvSpPr>
+        <p:spPr/>
+        <p:txBody>
+          <a:bodyPr/>
+          <a:lstStyle/>
+          <a:p/>
+        </p:txBody>
+      </p:sp>
+      <p:sp>
+        <p:nvSpPr>
+          <p:cNvPr id="4" name="Slide Number Placeholder 3"/>
+          <p:cNvSpPr>
+            <a:spLocks noGrp="1"/>
+          </p:cNvSpPr>
+          <p:nvPr>
+            <p:ph type="sldNum" idx="5" sz="quarter"/>
+          </p:nvPr>
+        </p:nvSpPr>
+        <p:spPr/>
+      </p:sp>
+    </p:spTree>
+  </p:cSld>
+  <p:clrMapOvr>
+    <a:masterClrMapping/>
+  </p:clrMapOvr>
+</p:notes>
+</file>
+
+<file path=ppt/notesSlides/notesSlide34.xml><?xml version="1.0" encoding="utf-8"?>
+<p:notes xmlns:a="http://schemas.openxmlformats.org/drawingml/2006/main" xmlns:p="http://schemas.openxmlformats.org/presentationml/2006/main" xmlns:r="http://schemas.openxmlformats.org/officeDocument/2006/relationships">
+  <p:cSld>
+    <p:spTree>
+      <p:nvGrpSpPr>
+        <p:cNvPr id="1" name=""/>
+        <p:cNvGrpSpPr/>
+        <p:nvPr/>
+      </p:nvGrpSpPr>
+      <p:grpSpPr>
+        <a:xfrm>
+          <a:off x="0" y="0"/>
+          <a:ext cx="0" cy="0"/>
+          <a:chOff x="0" y="0"/>
+          <a:chExt cx="0" cy="0"/>
+        </a:xfrm>
+      </p:grpSpPr>
+      <p:sp>
+        <p:nvSpPr>
+          <p:cNvPr id="2" name="Slide Image Placeholder 1"/>
+          <p:cNvSpPr>
+            <a:spLocks noGrp="1"/>
+          </p:cNvSpPr>
+          <p:nvPr>
+            <p:ph type="sldImg" idx="2"/>
+          </p:nvPr>
+        </p:nvSpPr>
+        <p:spPr/>
+      </p:sp>
+      <p:sp>
+        <p:nvSpPr>
+          <p:cNvPr id="3" name="Notes Placeholder 2"/>
+          <p:cNvSpPr>
+            <a:spLocks noGrp="1"/>
+          </p:cNvSpPr>
+          <p:nvPr>
+            <p:ph type="body" idx="3" sz="quarter"/>
+          </p:nvPr>
+        </p:nvSpPr>
+        <p:spPr/>
+        <p:txBody>
+          <a:bodyPr/>
+          <a:lstStyle/>
+          <a:p/>
+        </p:txBody>
+      </p:sp>
+      <p:sp>
+        <p:nvSpPr>
+          <p:cNvPr id="4" name="Slide Number Placeholder 3"/>
+          <p:cNvSpPr>
+            <a:spLocks noGrp="1"/>
+          </p:cNvSpPr>
+          <p:nvPr>
+            <p:ph type="sldNum" idx="5" sz="quarter"/>
+          </p:nvPr>
+        </p:nvSpPr>
+        <p:spPr/>
+      </p:sp>
+    </p:spTree>
+  </p:cSld>
+  <p:clrMapOvr>
+    <a:masterClrMapping/>
+  </p:clrMapOvr>
+</p:notes>
+</file>
+
+<file path=ppt/notesSlides/notesSlide35.xml><?xml version="1.0" encoding="utf-8"?>
+<p:notes xmlns:a="http://schemas.openxmlformats.org/drawingml/2006/main" xmlns:p="http://schemas.openxmlformats.org/presentationml/2006/main" xmlns:r="http://schemas.openxmlformats.org/officeDocument/2006/relationships">
+  <p:cSld>
+    <p:spTree>
+      <p:nvGrpSpPr>
+        <p:cNvPr id="1" name=""/>
+        <p:cNvGrpSpPr/>
+        <p:nvPr/>
+      </p:nvGrpSpPr>
+      <p:grpSpPr>
+        <a:xfrm>
+          <a:off x="0" y="0"/>
+          <a:ext cx="0" cy="0"/>
+          <a:chOff x="0" y="0"/>
+          <a:chExt cx="0" cy="0"/>
+        </a:xfrm>
+      </p:grpSpPr>
+      <p:sp>
+        <p:nvSpPr>
+          <p:cNvPr id="2" name="Slide Image Placeholder 1"/>
+          <p:cNvSpPr>
+            <a:spLocks noGrp="1"/>
+          </p:cNvSpPr>
+          <p:nvPr>
+            <p:ph type="sldImg" idx="2"/>
+          </p:nvPr>
+        </p:nvSpPr>
+        <p:spPr/>
+      </p:sp>
+      <p:sp>
+        <p:nvSpPr>
+          <p:cNvPr id="3" name="Notes Placeholder 2"/>
+          <p:cNvSpPr>
+            <a:spLocks noGrp="1"/>
+          </p:cNvSpPr>
+          <p:nvPr>
+            <p:ph type="body" idx="3" sz="quarter"/>
+          </p:nvPr>
+        </p:nvSpPr>
+        <p:spPr/>
+        <p:txBody>
+          <a:bodyPr/>
+          <a:lstStyle/>
+          <a:p>
+            <a:r>
+              <a:t>Close with priorities. Invite involvement.</a:t>
+            </a:r>
+          </a:p>
+          <a:p>
+            <a:r>
+              <a:t>Key question: what ships early without fragmenting consensus?</a:t>
             </a:r>
           </a:p>
         </p:txBody>
@@ -12366,7 +13032,7 @@
               </a:defRPr>
             </a:pPr>
             <a:r>
-              <a:t>References</a:t>
+              <a:t>References (1/11)</a:t>
             </a:r>
           </a:p>
         </p:txBody>
@@ -12422,8 +13088,8 @@
         </p:nvSpPr>
         <p:spPr>
           <a:xfrm>
-            <a:off x="640080" y="1874519"/>
-            <a:ext cx="5029200" cy="457200"/>
+            <a:off x="640080" y="1783080"/>
+            <a:ext cx="10972800" cy="4572000"/>
           </a:xfrm>
           <a:prstGeom prst="rect">
             <a:avLst/>
@@ -12431,13 +13097,19 @@
           <a:noFill/>
         </p:spPr>
         <p:txBody>
-          <a:bodyPr wrap="none">
+          <a:bodyPr wrap="square" lIns="0" rIns="0" tIns="0" bIns="0">
             <a:spAutoFit/>
           </a:bodyPr>
           <a:lstStyle/>
           <a:p>
             <a:pPr>
-              <a:defRPr sz="2200" b="1">
+              <a:spcBef>
+                <a:spcPts val="800"/>
+              </a:spcBef>
+              <a:spcAft>
+                <a:spcPts val="400"/>
+              </a:spcAft>
+              <a:defRPr sz="1800" b="1">
                 <a:solidFill>
                   <a:srgbClr val="F7931A"/>
                 </a:solidFill>
@@ -12445,351 +13117,124 @@
               </a:defRPr>
             </a:pPr>
             <a:r>
-              <a:t>Key references</a:t>
-            </a:r>
-          </a:p>
-        </p:txBody>
-      </p:sp>
-      <p:sp>
-        <p:nvSpPr>
-          <p:cNvPr id="8" name="TextBox 7"/>
-          <p:cNvSpPr txBox="1"/>
-          <p:nvPr/>
-        </p:nvSpPr>
-        <p:spPr>
-          <a:xfrm>
-            <a:off x="640080" y="2377440"/>
-            <a:ext cx="5303520" cy="3657600"/>
-          </a:xfrm>
-          <a:prstGeom prst="rect">
-            <a:avLst/>
-          </a:prstGeom>
-          <a:noFill/>
-        </p:spPr>
-        <p:txBody>
-          <a:bodyPr wrap="square">
-            <a:spAutoFit/>
-          </a:bodyPr>
-          <a:lstStyle/>
-          <a:p>
-            <a:pPr>
+              <a:t>What is QC</a:t>
+            </a:r>
+          </a:p>
+          <a:p>
+            <a:pPr>
+              <a:spcBef>
+                <a:spcPts val="0"/>
+              </a:spcBef>
               <a:spcAft>
-                <a:spcPts val="300"/>
+                <a:spcPts val="100"/>
               </a:spcAft>
             </a:pPr>
             <a:r>
-              <a:rPr sz="1400" b="1">
+              <a:rPr sz="1200" b="1">
                 <a:solidFill>
                   <a:srgbClr val="F5F0E8"/>
                 </a:solidFill>
                 <a:latin typeface="Liberation Sans"/>
                 <a:hlinkClick r:id="rId3"/>
               </a:rPr>
-              <a:t>BIP-360 (P2MR)</a:t>
-            </a:r>
-          </a:p>
-          <a:p>
-            <a:pPr>
+              <a:t>1. IBM Quantum Learning: Bits, Gates, and Circuits</a:t>
+            </a:r>
+          </a:p>
+          <a:p>
+            <a:pPr>
+              <a:spcBef>
+                <a:spcPts val="0"/>
+              </a:spcBef>
               <a:spcAft>
-                <a:spcPts val="700"/>
+                <a:spcPts val="600"/>
               </a:spcAft>
-              <a:defRPr sz="900">
+            </a:pPr>
+            <a:r>
+              <a:rPr sz="1200" b="0">
                 <a:solidFill>
                   <a:srgbClr val="888888"/>
                 </a:solidFill>
                 <a:latin typeface="Liberation Sans"/>
-              </a:defRPr>
-            </a:pPr>
-            <a:r>
-              <a:t>github.com/bitcoin/bips/blob/master/bip-0360.mediawiki</a:t>
-            </a:r>
-          </a:p>
-          <a:p>
-            <a:pPr>
+              </a:rPr>
+              <a:t>IBM's technical introduction to qubits, quantum gates, and circuits — aimed at people with a computing background, no physics degree required.</a:t>
+            </a:r>
+          </a:p>
+          <a:p>
+            <a:pPr>
+              <a:spcBef>
+                <a:spcPts val="0"/>
+              </a:spcBef>
               <a:spcAft>
-                <a:spcPts val="300"/>
+                <a:spcPts val="100"/>
               </a:spcAft>
             </a:pPr>
             <a:r>
-              <a:rPr sz="1400" b="1">
+              <a:rPr sz="1200" b="1">
                 <a:solidFill>
                   <a:srgbClr val="F5F0E8"/>
                 </a:solidFill>
                 <a:latin typeface="Liberation Sans"/>
                 <a:hlinkClick r:id="rId4"/>
               </a:rPr>
-              <a:t>bip360.org</a:t>
-            </a:r>
-          </a:p>
-          <a:p>
-            <a:pPr>
+              <a:t>2. Classiq: The Deutsch-Jozsa Algorithm Explained</a:t>
+            </a:r>
+          </a:p>
+          <a:p>
+            <a:pPr>
+              <a:spcBef>
+                <a:spcPts val="0"/>
+              </a:spcBef>
               <a:spcAft>
-                <a:spcPts val="700"/>
+                <a:spcPts val="600"/>
               </a:spcAft>
-              <a:defRPr sz="900">
+            </a:pPr>
+            <a:r>
+              <a:rPr sz="1200" b="0">
                 <a:solidFill>
                   <a:srgbClr val="888888"/>
                 </a:solidFill>
                 <a:latin typeface="Liberation Sans"/>
-              </a:defRPr>
-            </a:pPr>
-            <a:r>
-              <a:t>bip360.org/bip360.html</a:t>
-            </a:r>
-          </a:p>
-          <a:p>
-            <a:pPr>
+              </a:rPr>
+              <a:t>Step-by-step walkthrough of the Deutsch oracle problem and circuit — the simplest demonstration that a quantum computer can outperform a classical one.</a:t>
+            </a:r>
+          </a:p>
+          <a:p>
+            <a:pPr>
+              <a:spcBef>
+                <a:spcPts val="0"/>
+              </a:spcBef>
               <a:spcAft>
-                <a:spcPts val="300"/>
+                <a:spcPts val="100"/>
               </a:spcAft>
             </a:pPr>
             <a:r>
-              <a:rPr sz="1400" b="1">
+              <a:rPr sz="1200" b="1">
                 <a:solidFill>
                   <a:srgbClr val="F5F0E8"/>
                 </a:solidFill>
                 <a:latin typeface="Liberation Sans"/>
                 <a:hlinkClick r:id="rId5"/>
               </a:rPr>
-              <a:t>GRI Quantum Threat 2024</a:t>
-            </a:r>
-          </a:p>
-          <a:p>
-            <a:pPr>
+              <a:t>3. Bitcoin Magazine: Quantum Bitcoin Summit</a:t>
+            </a:r>
+          </a:p>
+          <a:p>
+            <a:pPr>
+              <a:spcBef>
+                <a:spcPts val="0"/>
+              </a:spcBef>
               <a:spcAft>
-                <a:spcPts val="700"/>
+                <a:spcPts val="600"/>
               </a:spcAft>
-              <a:defRPr sz="900">
+            </a:pPr>
+            <a:r>
+              <a:rPr sz="1200" b="0">
                 <a:solidFill>
                   <a:srgbClr val="888888"/>
                 </a:solidFill>
                 <a:latin typeface="Liberation Sans"/>
-              </a:defRPr>
-            </a:pPr>
-            <a:r>
-              <a:t>globalriskinstitute.org</a:t>
-            </a:r>
-          </a:p>
-          <a:p>
-            <a:pPr>
-              <a:spcAft>
-                <a:spcPts val="300"/>
-              </a:spcAft>
-            </a:pPr>
-            <a:r>
-              <a:rPr sz="1400" b="1">
-                <a:solidFill>
-                  <a:srgbClr val="F5F0E8"/>
-                </a:solidFill>
-                <a:latin typeface="Liberation Sans"/>
-                <a:hlinkClick r:id="rId6"/>
               </a:rPr>
-              <a:t>BitMEX Taproot Quantum</a:t>
-            </a:r>
-          </a:p>
-          <a:p>
-            <a:pPr>
-              <a:spcAft>
-                <a:spcPts val="700"/>
-              </a:spcAft>
-              <a:defRPr sz="900">
-                <a:solidFill>
-                  <a:srgbClr val="888888"/>
-                </a:solidFill>
-                <a:latin typeface="Liberation Sans"/>
-              </a:defRPr>
-            </a:pPr>
-            <a:r>
-              <a:t>bitmex.com/blog/Taproot-Quantum-Spend-Paths</a:t>
-            </a:r>
-          </a:p>
-          <a:p>
-            <a:pPr>
-              <a:spcAft>
-                <a:spcPts val="300"/>
-              </a:spcAft>
-            </a:pPr>
-            <a:r>
-              <a:rPr sz="1400" b="1">
-                <a:solidFill>
-                  <a:srgbClr val="F5F0E8"/>
-                </a:solidFill>
-                <a:latin typeface="Liberation Sans"/>
-                <a:hlinkClick r:id="rId7"/>
-              </a:rPr>
-              <a:t>BTC Mag: Quantum Summit</a:t>
-            </a:r>
-          </a:p>
-          <a:p>
-            <a:pPr>
-              <a:spcAft>
-                <a:spcPts val="700"/>
-              </a:spcAft>
-              <a:defRPr sz="900">
-                <a:solidFill>
-                  <a:srgbClr val="888888"/>
-                </a:solidFill>
-                <a:latin typeface="Liberation Sans"/>
-              </a:defRPr>
-            </a:pPr>
-            <a:r>
-              <a:t>bitcoinmagazine.com/technical/the-quantum-bitcoin-summit</a:t>
-            </a:r>
-          </a:p>
-          <a:p>
-            <a:pPr>
-              <a:spcAft>
-                <a:spcPts val="300"/>
-              </a:spcAft>
-            </a:pPr>
-            <a:r>
-              <a:rPr sz="1400" b="1">
-                <a:solidFill>
-                  <a:srgbClr val="F5F0E8"/>
-                </a:solidFill>
-                <a:latin typeface="Liberation Sans"/>
-                <a:hlinkClick r:id="rId8"/>
-              </a:rPr>
-              <a:t>NIST PQC project</a:t>
-            </a:r>
-          </a:p>
-          <a:p>
-            <a:pPr>
-              <a:spcAft>
-                <a:spcPts val="700"/>
-              </a:spcAft>
-              <a:defRPr sz="900">
-                <a:solidFill>
-                  <a:srgbClr val="888888"/>
-                </a:solidFill>
-                <a:latin typeface="Liberation Sans"/>
-              </a:defRPr>
-            </a:pPr>
-            <a:r>
-              <a:t>csrc.nist.gov/projects/post-quantum-cryptography</a:t>
-            </a:r>
-          </a:p>
-        </p:txBody>
-      </p:sp>
-      <p:sp>
-        <p:nvSpPr>
-          <p:cNvPr id="9" name="TextBox 8"/>
-          <p:cNvSpPr txBox="1"/>
-          <p:nvPr/>
-        </p:nvSpPr>
-        <p:spPr>
-          <a:xfrm>
-            <a:off x="6309360" y="1874519"/>
-            <a:ext cx="5029200" cy="457200"/>
-          </a:xfrm>
-          <a:prstGeom prst="rect">
-            <a:avLst/>
-          </a:prstGeom>
-          <a:noFill/>
-        </p:spPr>
-        <p:txBody>
-          <a:bodyPr wrap="none">
-            <a:spAutoFit/>
-          </a:bodyPr>
-          <a:lstStyle/>
-          <a:p>
-            <a:pPr>
-              <a:defRPr sz="2200" b="1">
-                <a:solidFill>
-                  <a:srgbClr val="F7931A"/>
-                </a:solidFill>
-                <a:latin typeface="Liberation Sans"/>
-              </a:defRPr>
-            </a:pPr>
-            <a:r>
-              <a:t>Additional sources</a:t>
-            </a:r>
-          </a:p>
-        </p:txBody>
-      </p:sp>
-      <p:sp>
-        <p:nvSpPr>
-          <p:cNvPr id="10" name="TextBox 9"/>
-          <p:cNvSpPr txBox="1"/>
-          <p:nvPr/>
-        </p:nvSpPr>
-        <p:spPr>
-          <a:xfrm>
-            <a:off x="6309360" y="2377440"/>
-            <a:ext cx="4846320" cy="3657600"/>
-          </a:xfrm>
-          <a:prstGeom prst="rect">
-            <a:avLst/>
-          </a:prstGeom>
-          <a:noFill/>
-        </p:spPr>
-        <p:txBody>
-          <a:bodyPr wrap="square">
-            <a:spAutoFit/>
-          </a:bodyPr>
-          <a:lstStyle/>
-          <a:p>
-            <a:pPr>
-              <a:spcAft>
-                <a:spcPts val="1100"/>
-              </a:spcAft>
-              <a:defRPr sz="1400">
-                <a:solidFill>
-                  <a:srgbClr val="F5F0E8"/>
-                </a:solidFill>
-                <a:latin typeface="Liberation Sans"/>
-              </a:defRPr>
-            </a:pPr>
-            <a:r>
-              <a:t>Hourglass BIP (legacy coin rate-limiting)</a:t>
-            </a:r>
-          </a:p>
-          <a:p>
-            <a:pPr>
-              <a:spcAft>
-                <a:spcPts val="1100"/>
-              </a:spcAft>
-              <a:defRPr sz="1400">
-                <a:solidFill>
-                  <a:srgbClr val="F5F0E8"/>
-                </a:solidFill>
-                <a:latin typeface="Liberation Sans"/>
-              </a:defRPr>
-            </a:pPr>
-            <a:r>
-              <a:t>Lopp: Against Quantum Recovery of Bitcoin</a:t>
-            </a:r>
-          </a:p>
-          <a:p>
-            <a:pPr>
-              <a:spcAft>
-                <a:spcPts val="1100"/>
-              </a:spcAft>
-              <a:defRPr sz="1400">
-                <a:solidFill>
-                  <a:srgbClr val="F5F0E8"/>
-                </a:solidFill>
-                <a:latin typeface="Liberation Sans"/>
-              </a:defRPr>
-            </a:pPr>
-            <a:r>
-              <a:t>CNSA 2.0 / NIST IR 8547 timelines</a:t>
-            </a:r>
-          </a:p>
-          <a:p>
-            <a:pPr>
-              <a:spcAft>
-                <a:spcPts val="1100"/>
-              </a:spcAft>
-              <a:defRPr sz="1400">
-                <a:solidFill>
-                  <a:srgbClr val="F5F0E8"/>
-                </a:solidFill>
-                <a:latin typeface="Liberation Sans"/>
-              </a:defRPr>
-            </a:pPr>
-            <a:r>
-              <a:t>TradingView: 7-year upgrade estimate</a:t>
+              <a:t>Summary of a summit bringing together quantum computing and Bitcoin experts to examine the real threats and separate hype from substance.</a:t>
             </a:r>
           </a:p>
         </p:txBody>
@@ -12946,7 +13391,7 @@
               </a:defRPr>
             </a:pPr>
             <a:r>
-              <a:t>Questions?</a:t>
+              <a:t>References (2/11)</a:t>
             </a:r>
           </a:p>
         </p:txBody>
@@ -13002,8 +13447,291 @@
         </p:nvSpPr>
         <p:spPr>
           <a:xfrm>
-            <a:off x="640080" y="1371600"/>
-            <a:ext cx="9601200" cy="411480"/>
+            <a:off x="640080" y="1783080"/>
+            <a:ext cx="10972800" cy="4572000"/>
+          </a:xfrm>
+          <a:prstGeom prst="rect">
+            <a:avLst/>
+          </a:prstGeom>
+          <a:noFill/>
+        </p:spPr>
+        <p:txBody>
+          <a:bodyPr wrap="square" lIns="0" rIns="0" tIns="0" bIns="0">
+            <a:spAutoFit/>
+          </a:bodyPr>
+          <a:lstStyle/>
+          <a:p>
+            <a:pPr>
+              <a:spcBef>
+                <a:spcPts val="800"/>
+              </a:spcBef>
+              <a:spcAft>
+                <a:spcPts val="400"/>
+              </a:spcAft>
+              <a:defRPr sz="1800" b="1">
+                <a:solidFill>
+                  <a:srgbClr val="F7931A"/>
+                </a:solidFill>
+                <a:latin typeface="Liberation Sans"/>
+              </a:defRPr>
+            </a:pPr>
+            <a:r>
+              <a:t>What is the threat</a:t>
+            </a:r>
+          </a:p>
+          <a:p>
+            <a:pPr>
+              <a:spcBef>
+                <a:spcPts val="0"/>
+              </a:spcBef>
+              <a:spcAft>
+                <a:spcPts val="100"/>
+              </a:spcAft>
+            </a:pPr>
+            <a:r>
+              <a:rPr sz="1200" b="1">
+                <a:solidFill>
+                  <a:srgbClr val="F5F0E8"/>
+                </a:solidFill>
+                <a:latin typeface="Liberation Sans"/>
+                <a:hlinkClick r:id="rId3"/>
+              </a:rPr>
+              <a:t>4. Grover's Search Algorithm Overview</a:t>
+            </a:r>
+          </a:p>
+          <a:p>
+            <a:pPr>
+              <a:spcBef>
+                <a:spcPts val="0"/>
+              </a:spcBef>
+              <a:spcAft>
+                <a:spcPts val="600"/>
+              </a:spcAft>
+            </a:pPr>
+            <a:r>
+              <a:rPr sz="1200" b="0">
+                <a:solidFill>
+                  <a:srgbClr val="888888"/>
+                </a:solidFill>
+                <a:latin typeface="Liberation Sans"/>
+              </a:rPr>
+              <a:t>Microsoft's explanation of Grover's quantum search algorithm, which provides a quadratic speedup for unstructured search problems.</a:t>
+            </a:r>
+          </a:p>
+          <a:p>
+            <a:pPr>
+              <a:spcBef>
+                <a:spcPts val="0"/>
+              </a:spcBef>
+              <a:spcAft>
+                <a:spcPts val="100"/>
+              </a:spcAft>
+            </a:pPr>
+            <a:r>
+              <a:rPr sz="1200" b="1">
+                <a:solidFill>
+                  <a:srgbClr val="F5F0E8"/>
+                </a:solidFill>
+                <a:latin typeface="Liberation Sans"/>
+                <a:hlinkClick r:id="rId4"/>
+              </a:rPr>
+              <a:t>5. Quantum Resource Estimates for ECDLP</a:t>
+            </a:r>
+          </a:p>
+          <a:p>
+            <a:pPr>
+              <a:spcBef>
+                <a:spcPts val="0"/>
+              </a:spcBef>
+              <a:spcAft>
+                <a:spcPts val="600"/>
+              </a:spcAft>
+            </a:pPr>
+            <a:r>
+              <a:rPr sz="1200" b="0">
+                <a:solidFill>
+                  <a:srgbClr val="888888"/>
+                </a:solidFill>
+                <a:latin typeface="Liberation Sans"/>
+              </a:rPr>
+              <a:t>Roetteler et al. (2017) foundational paper estimating ~2,330 logical qubits and ~1.29 × 10¹¹ Toffoli gates to break 256-bit ECC using Shor's algorithm.</a:t>
+            </a:r>
+          </a:p>
+          <a:p>
+            <a:pPr>
+              <a:spcBef>
+                <a:spcPts val="0"/>
+              </a:spcBef>
+              <a:spcAft>
+                <a:spcPts val="100"/>
+              </a:spcAft>
+            </a:pPr>
+            <a:r>
+              <a:rPr sz="1200" b="1">
+                <a:solidFill>
+                  <a:srgbClr val="F5F0E8"/>
+                </a:solidFill>
+                <a:latin typeface="Liberation Sans"/>
+                <a:hlinkClick r:id="rId5"/>
+              </a:rPr>
+              <a:t>6. Ha, Lee &amp; Heo (2024) — Resource analysis for ECDLP with noisy qubits</a:t>
+            </a:r>
+          </a:p>
+          <a:p>
+            <a:pPr>
+              <a:spcBef>
+                <a:spcPts val="0"/>
+              </a:spcBef>
+              <a:spcAft>
+                <a:spcPts val="600"/>
+              </a:spcAft>
+            </a:pPr>
+            <a:r>
+              <a:rPr sz="1200" b="0">
+                <a:solidFill>
+                  <a:srgbClr val="888888"/>
+                </a:solidFill>
+                <a:latin typeface="Liberation Sans"/>
+              </a:rPr>
+              <a:t>First comprehensive physical qubit estimate for ECDLP under surface codes: ~5.87 million physical qubits for P-256 at 10⁻³ error rate with 200 ns cycle time.</a:t>
+            </a:r>
+          </a:p>
+          <a:p>
+            <a:pPr>
+              <a:spcBef>
+                <a:spcPts val="0"/>
+              </a:spcBef>
+              <a:spcAft>
+                <a:spcPts val="100"/>
+              </a:spcAft>
+            </a:pPr>
+            <a:r>
+              <a:rPr sz="1200" b="1">
+                <a:solidFill>
+                  <a:srgbClr val="F5F0E8"/>
+                </a:solidFill>
+                <a:latin typeface="Liberation Sans"/>
+                <a:hlinkClick r:id="rId6"/>
+              </a:rPr>
+              <a:t>7. Ed25519 Optimisation (2025)</a:t>
+            </a:r>
+          </a:p>
+          <a:p>
+            <a:pPr>
+              <a:spcBef>
+                <a:spcPts val="0"/>
+              </a:spcBef>
+              <a:spcAft>
+                <a:spcPts val="600"/>
+              </a:spcAft>
+            </a:pPr>
+            <a:r>
+              <a:rPr sz="1200" b="0">
+                <a:solidFill>
+                  <a:srgbClr val="888888"/>
+                </a:solidFill>
+                <a:latin typeface="Liberation Sans"/>
+              </a:rPr>
+              <a:t>Achieves 97% reduction in T-count, 60% reduction in T-depth, and 16% fewer qubits for quantum attacks on Ed25519 by exploiting its specific finite field structure.</a:t>
+            </a:r>
+          </a:p>
+        </p:txBody>
+      </p:sp>
+    </p:spTree>
+  </p:cSld>
+  <p:clrMapOvr>
+    <a:masterClrMapping/>
+  </p:clrMapOvr>
+</p:sld>
+</file>
+
+<file path=ppt/slides/slide26.xml><?xml version="1.0" encoding="utf-8"?>
+<p:sld xmlns:a="http://schemas.openxmlformats.org/drawingml/2006/main" xmlns:p="http://schemas.openxmlformats.org/presentationml/2006/main" xmlns:r="http://schemas.openxmlformats.org/officeDocument/2006/relationships">
+  <p:cSld>
+    <p:spTree>
+      <p:nvGrpSpPr>
+        <p:cNvPr id="1" name=""/>
+        <p:cNvGrpSpPr/>
+        <p:nvPr/>
+      </p:nvGrpSpPr>
+      <p:grpSpPr/>
+      <p:sp>
+        <p:nvSpPr>
+          <p:cNvPr id="2" name="Rectangle 1"/>
+          <p:cNvSpPr/>
+          <p:nvPr/>
+        </p:nvSpPr>
+        <p:spPr>
+          <a:xfrm>
+            <a:off x="0" y="0"/>
+            <a:ext cx="12191695" cy="6858000"/>
+          </a:xfrm>
+          <a:prstGeom prst="rect">
+            <a:avLst/>
+          </a:prstGeom>
+          <a:solidFill>
+            <a:srgbClr val="000000"/>
+          </a:solidFill>
+          <a:ln>
+            <a:noFill/>
+          </a:ln>
+        </p:spPr>
+        <p:style>
+          <a:lnRef idx="1">
+            <a:schemeClr val="accent1"/>
+          </a:lnRef>
+          <a:fillRef idx="3">
+            <a:schemeClr val="accent1"/>
+          </a:fillRef>
+          <a:effectRef idx="2">
+            <a:schemeClr val="accent1"/>
+          </a:effectRef>
+          <a:fontRef idx="minor">
+            <a:schemeClr val="lt1"/>
+          </a:fontRef>
+        </p:style>
+        <p:txBody>
+          <a:bodyPr rtlCol="0" anchor="ctr"/>
+          <a:lstStyle/>
+          <a:p>
+            <a:pPr algn="ctr"/>
+          </a:p>
+        </p:txBody>
+      </p:sp>
+      <p:pic>
+        <p:nvPicPr>
+          <p:cNvPr id="3" name="Picture 2" descr="bitcoinbushbash-logo.png"/>
+          <p:cNvPicPr>
+            <a:picLocks noChangeAspect="1"/>
+          </p:cNvPicPr>
+          <p:nvPr/>
+        </p:nvPicPr>
+        <p:blipFill>
+          <a:blip r:embed="rId2"/>
+          <a:stretch>
+            <a:fillRect/>
+          </a:stretch>
+        </p:blipFill>
+        <p:spPr>
+          <a:xfrm>
+            <a:off x="10698480" y="109728"/>
+            <a:ext cx="1353312" cy="1353312"/>
+          </a:xfrm>
+          <a:prstGeom prst="rect">
+            <a:avLst/>
+          </a:prstGeom>
+        </p:spPr>
+      </p:pic>
+      <p:sp>
+        <p:nvSpPr>
+          <p:cNvPr id="4" name="TextBox 3"/>
+          <p:cNvSpPr txBox="1"/>
+          <p:nvPr/>
+        </p:nvSpPr>
+        <p:spPr>
+          <a:xfrm>
+            <a:off x="640080" y="6446520"/>
+            <a:ext cx="3657600" cy="228600"/>
           </a:xfrm>
           <a:prstGeom prst="rect">
             <a:avLst/>
@@ -13017,29 +13745,29 @@
           <a:lstStyle/>
           <a:p>
             <a:pPr>
-              <a:defRPr sz="1700">
-                <a:solidFill>
-                  <a:srgbClr val="F4C27A"/>
-                </a:solidFill>
-                <a:latin typeface="Liberation Sans"/>
-              </a:defRPr>
-            </a:pPr>
-            <a:r>
-              <a:t>Where should Bitcoin move first?</a:t>
-            </a:r>
-          </a:p>
-        </p:txBody>
-      </p:sp>
-      <p:sp>
-        <p:nvSpPr>
-          <p:cNvPr id="8" name="TextBox 7"/>
+              <a:defRPr sz="900">
+                <a:solidFill>
+                  <a:srgbClr val="888888"/>
+                </a:solidFill>
+                <a:latin typeface="Liberation Sans"/>
+              </a:defRPr>
+            </a:pPr>
+            <a:r>
+              <a:t>bitcoinbushbash.info</a:t>
+            </a:r>
+          </a:p>
+        </p:txBody>
+      </p:sp>
+      <p:sp>
+        <p:nvSpPr>
+          <p:cNvPr id="5" name="TextBox 4"/>
           <p:cNvSpPr txBox="1"/>
           <p:nvPr/>
         </p:nvSpPr>
         <p:spPr>
           <a:xfrm>
-            <a:off x="640080" y="2377440"/>
-            <a:ext cx="10058400" cy="4114800"/>
+            <a:off x="640080" y="228600"/>
+            <a:ext cx="9601200" cy="1005840"/>
           </a:xfrm>
           <a:prstGeom prst="rect">
             <a:avLst/>
@@ -13047,56 +13775,1398 @@
           <a:noFill/>
         </p:spPr>
         <p:txBody>
-          <a:bodyPr wrap="square">
+          <a:bodyPr wrap="none">
             <a:spAutoFit/>
           </a:bodyPr>
           <a:lstStyle/>
           <a:p>
             <a:pPr>
+              <a:defRPr sz="4200" b="1">
+                <a:solidFill>
+                  <a:srgbClr val="FFFFFF"/>
+                </a:solidFill>
+                <a:latin typeface="Liberation Sans"/>
+              </a:defRPr>
+            </a:pPr>
+            <a:r>
+              <a:t>References (3/11)</a:t>
+            </a:r>
+          </a:p>
+        </p:txBody>
+      </p:sp>
+      <p:sp>
+        <p:nvSpPr>
+          <p:cNvPr id="6" name="Rectangle 5"/>
+          <p:cNvSpPr/>
+          <p:nvPr/>
+        </p:nvSpPr>
+        <p:spPr>
+          <a:xfrm>
+            <a:off x="640080" y="1234440"/>
+            <a:ext cx="4114800" cy="50292"/>
+          </a:xfrm>
+          <a:prstGeom prst="rect">
+            <a:avLst/>
+          </a:prstGeom>
+          <a:solidFill>
+            <a:srgbClr val="F7931A"/>
+          </a:solidFill>
+          <a:ln>
+            <a:noFill/>
+          </a:ln>
+        </p:spPr>
+        <p:style>
+          <a:lnRef idx="1">
+            <a:schemeClr val="accent1"/>
+          </a:lnRef>
+          <a:fillRef idx="3">
+            <a:schemeClr val="accent1"/>
+          </a:fillRef>
+          <a:effectRef idx="2">
+            <a:schemeClr val="accent1"/>
+          </a:effectRef>
+          <a:fontRef idx="minor">
+            <a:schemeClr val="lt1"/>
+          </a:fontRef>
+        </p:style>
+        <p:txBody>
+          <a:bodyPr rtlCol="0" anchor="ctr"/>
+          <a:lstStyle/>
+          <a:p>
+            <a:pPr algn="ctr"/>
+          </a:p>
+        </p:txBody>
+      </p:sp>
+      <p:sp>
+        <p:nvSpPr>
+          <p:cNvPr id="7" name="TextBox 6"/>
+          <p:cNvSpPr txBox="1"/>
+          <p:nvPr/>
+        </p:nvSpPr>
+        <p:spPr>
+          <a:xfrm>
+            <a:off x="640080" y="1783080"/>
+            <a:ext cx="10972800" cy="4572000"/>
+          </a:xfrm>
+          <a:prstGeom prst="rect">
+            <a:avLst/>
+          </a:prstGeom>
+          <a:noFill/>
+        </p:spPr>
+        <p:txBody>
+          <a:bodyPr wrap="square" lIns="0" rIns="0" tIns="0" bIns="0">
+            <a:spAutoFit/>
+          </a:bodyPr>
+          <a:lstStyle/>
+          <a:p>
+            <a:pPr>
+              <a:spcBef>
+                <a:spcPts val="800"/>
+              </a:spcBef>
               <a:spcAft>
-                <a:spcPts val="1200"/>
+                <a:spcPts val="400"/>
               </a:spcAft>
-              <a:defRPr sz="3000" b="1">
+              <a:defRPr sz="1800" b="1">
+                <a:solidFill>
+                  <a:srgbClr val="F7931A"/>
+                </a:solidFill>
+                <a:latin typeface="Liberation Sans"/>
+              </a:defRPr>
+            </a:pPr>
+            <a:r>
+              <a:t>Bitcoin revision</a:t>
+            </a:r>
+          </a:p>
+          <a:p>
+            <a:pPr>
+              <a:spcBef>
+                <a:spcPts val="0"/>
+              </a:spcBef>
+              <a:spcAft>
+                <a:spcPts val="100"/>
+              </a:spcAft>
+            </a:pPr>
+            <a:r>
+              <a:rPr sz="1200" b="1">
                 <a:solidFill>
                   <a:srgbClr val="F5F0E8"/>
                 </a:solidFill>
                 <a:latin typeface="Liberation Sans"/>
-              </a:defRPr>
-            </a:pPr>
-            <a:r>
-              <a:t>Priority 1:  stop exposing public keys</a:t>
-            </a:r>
-          </a:p>
-          <a:p>
-            <a:pPr>
+                <a:hlinkClick r:id="rId3"/>
+              </a:rPr>
+              <a:t>8. Elliptic Curve Cryptography</a:t>
+            </a:r>
+          </a:p>
+          <a:p>
+            <a:pPr>
+              <a:spcBef>
+                <a:spcPts val="0"/>
+              </a:spcBef>
               <a:spcAft>
-                <a:spcPts val="1200"/>
+                <a:spcPts val="600"/>
               </a:spcAft>
-              <a:defRPr sz="3000" b="1">
+            </a:pPr>
+            <a:r>
+              <a:rPr sz="1200" b="0">
+                <a:solidFill>
+                  <a:srgbClr val="888888"/>
+                </a:solidFill>
+                <a:latin typeface="Liberation Sans"/>
+              </a:rPr>
+              <a:t>How Bitcoin uses the secp256k1 elliptic curve for key generation and digital signatures — the operation Shor's algorithm can reverse.</a:t>
+            </a:r>
+          </a:p>
+          <a:p>
+            <a:pPr>
+              <a:spcBef>
+                <a:spcPts val="0"/>
+              </a:spcBef>
+              <a:spcAft>
+                <a:spcPts val="100"/>
+              </a:spcAft>
+            </a:pPr>
+            <a:r>
+              <a:rPr sz="1200" b="1">
                 <a:solidFill>
                   <a:srgbClr val="F5F0E8"/>
                 </a:solidFill>
                 <a:latin typeface="Liberation Sans"/>
-              </a:defRPr>
-            </a:pPr>
-            <a:r>
-              <a:t>Priority 2:  safe upgrade path (BIP-360)</a:t>
-            </a:r>
-          </a:p>
-          <a:p>
-            <a:pPr>
+                <a:hlinkClick r:id="rId4"/>
+              </a:rPr>
+              <a:t>9. Digital Signatures</a:t>
+            </a:r>
+          </a:p>
+          <a:p>
+            <a:pPr>
+              <a:spcBef>
+                <a:spcPts val="0"/>
+              </a:spcBef>
               <a:spcAft>
-                <a:spcPts val="1200"/>
+                <a:spcPts val="600"/>
               </a:spcAft>
-              <a:defRPr sz="3000" b="1">
+            </a:pPr>
+            <a:r>
+              <a:rPr sz="1200" b="0">
+                <a:solidFill>
+                  <a:srgbClr val="888888"/>
+                </a:solidFill>
+                <a:latin typeface="Liberation Sans"/>
+              </a:rPr>
+              <a:t>How ECDSA and Schnorr signatures work in Bitcoin to authorise spending without revealing the private key.</a:t>
+            </a:r>
+          </a:p>
+          <a:p>
+            <a:pPr>
+              <a:spcBef>
+                <a:spcPts val="0"/>
+              </a:spcBef>
+              <a:spcAft>
+                <a:spcPts val="100"/>
+              </a:spcAft>
+            </a:pPr>
+            <a:r>
+              <a:rPr sz="1200" b="1">
                 <a:solidFill>
                   <a:srgbClr val="F5F0E8"/>
                 </a:solidFill>
                 <a:latin typeface="Liberation Sans"/>
-              </a:defRPr>
-            </a:pPr>
-            <a:r>
-              <a:t>Priority 3:  social consensus on legacy coins</a:t>
+                <a:hlinkClick r:id="rId5"/>
+              </a:rPr>
+              <a:t>10. Hash Functions</a:t>
+            </a:r>
+          </a:p>
+          <a:p>
+            <a:pPr>
+              <a:spcBef>
+                <a:spcPts val="0"/>
+              </a:spcBef>
+              <a:spcAft>
+                <a:spcPts val="600"/>
+              </a:spcAft>
+            </a:pPr>
+            <a:r>
+              <a:rPr sz="1200" b="0">
+                <a:solidFill>
+                  <a:srgbClr val="888888"/>
+                </a:solidFill>
+                <a:latin typeface="Liberation Sans"/>
+              </a:rPr>
+              <a:t>Overview of SHA-256 and RIPEMD-160 as used in Bitcoin for mining, addresses, and data integrity — Grover's algorithm provides only a quadratic speedup against these.</a:t>
+            </a:r>
+          </a:p>
+          <a:p>
+            <a:pPr>
+              <a:spcBef>
+                <a:spcPts val="0"/>
+              </a:spcBef>
+              <a:spcAft>
+                <a:spcPts val="100"/>
+              </a:spcAft>
+            </a:pPr>
+            <a:r>
+              <a:rPr sz="1200" b="1">
+                <a:solidFill>
+                  <a:srgbClr val="F5F0E8"/>
+                </a:solidFill>
+                <a:latin typeface="Liberation Sans"/>
+                <a:hlinkClick r:id="rId6"/>
+              </a:rPr>
+              <a:t>11. Memory Pool</a:t>
+            </a:r>
+          </a:p>
+          <a:p>
+            <a:pPr>
+              <a:spcBef>
+                <a:spcPts val="0"/>
+              </a:spcBef>
+              <a:spcAft>
+                <a:spcPts val="600"/>
+              </a:spcAft>
+            </a:pPr>
+            <a:r>
+              <a:rPr sz="1200" b="0">
+                <a:solidFill>
+                  <a:srgbClr val="888888"/>
+                </a:solidFill>
+                <a:latin typeface="Liberation Sans"/>
+              </a:rPr>
+              <a:t>The mempool where unconfirmed transactions wait — the window during which a short exposure quantum attack could occur.</a:t>
+            </a:r>
+          </a:p>
+          <a:p>
+            <a:pPr>
+              <a:spcBef>
+                <a:spcPts val="0"/>
+              </a:spcBef>
+              <a:spcAft>
+                <a:spcPts val="100"/>
+              </a:spcAft>
+            </a:pPr>
+            <a:r>
+              <a:rPr sz="1200" b="1">
+                <a:solidFill>
+                  <a:srgbClr val="F5F0E8"/>
+                </a:solidFill>
+                <a:latin typeface="Liberation Sans"/>
+                <a:hlinkClick r:id="rId7"/>
+              </a:rPr>
+              <a:t>12. Taproot (P2TR)</a:t>
+            </a:r>
+          </a:p>
+          <a:p>
+            <a:pPr>
+              <a:spcBef>
+                <a:spcPts val="0"/>
+              </a:spcBef>
+              <a:spcAft>
+                <a:spcPts val="600"/>
+              </a:spcAft>
+            </a:pPr>
+            <a:r>
+              <a:rPr sz="1200" b="0">
+                <a:solidFill>
+                  <a:srgbClr val="888888"/>
+                </a:solidFill>
+                <a:latin typeface="Liberation Sans"/>
+              </a:rPr>
+              <a:t>Pay-to-Taproot: exposes a tweaked public key on-chain, making unspent P2TR outputs vulnerable to long exposure quantum attacks.</a:t>
+            </a:r>
+          </a:p>
+        </p:txBody>
+      </p:sp>
+    </p:spTree>
+  </p:cSld>
+  <p:clrMapOvr>
+    <a:masterClrMapping/>
+  </p:clrMapOvr>
+</p:sld>
+</file>
+
+<file path=ppt/slides/slide27.xml><?xml version="1.0" encoding="utf-8"?>
+<p:sld xmlns:a="http://schemas.openxmlformats.org/drawingml/2006/main" xmlns:p="http://schemas.openxmlformats.org/presentationml/2006/main" xmlns:r="http://schemas.openxmlformats.org/officeDocument/2006/relationships">
+  <p:cSld>
+    <p:spTree>
+      <p:nvGrpSpPr>
+        <p:cNvPr id="1" name=""/>
+        <p:cNvGrpSpPr/>
+        <p:nvPr/>
+      </p:nvGrpSpPr>
+      <p:grpSpPr/>
+      <p:sp>
+        <p:nvSpPr>
+          <p:cNvPr id="2" name="Rectangle 1"/>
+          <p:cNvSpPr/>
+          <p:nvPr/>
+        </p:nvSpPr>
+        <p:spPr>
+          <a:xfrm>
+            <a:off x="0" y="0"/>
+            <a:ext cx="12191695" cy="6858000"/>
+          </a:xfrm>
+          <a:prstGeom prst="rect">
+            <a:avLst/>
+          </a:prstGeom>
+          <a:solidFill>
+            <a:srgbClr val="000000"/>
+          </a:solidFill>
+          <a:ln>
+            <a:noFill/>
+          </a:ln>
+        </p:spPr>
+        <p:style>
+          <a:lnRef idx="1">
+            <a:schemeClr val="accent1"/>
+          </a:lnRef>
+          <a:fillRef idx="3">
+            <a:schemeClr val="accent1"/>
+          </a:fillRef>
+          <a:effectRef idx="2">
+            <a:schemeClr val="accent1"/>
+          </a:effectRef>
+          <a:fontRef idx="minor">
+            <a:schemeClr val="lt1"/>
+          </a:fontRef>
+        </p:style>
+        <p:txBody>
+          <a:bodyPr rtlCol="0" anchor="ctr"/>
+          <a:lstStyle/>
+          <a:p>
+            <a:pPr algn="ctr"/>
+          </a:p>
+        </p:txBody>
+      </p:sp>
+      <p:pic>
+        <p:nvPicPr>
+          <p:cNvPr id="3" name="Picture 2" descr="bitcoinbushbash-logo.png"/>
+          <p:cNvPicPr>
+            <a:picLocks noChangeAspect="1"/>
+          </p:cNvPicPr>
+          <p:nvPr/>
+        </p:nvPicPr>
+        <p:blipFill>
+          <a:blip r:embed="rId2"/>
+          <a:stretch>
+            <a:fillRect/>
+          </a:stretch>
+        </p:blipFill>
+        <p:spPr>
+          <a:xfrm>
+            <a:off x="10698480" y="109728"/>
+            <a:ext cx="1353312" cy="1353312"/>
+          </a:xfrm>
+          <a:prstGeom prst="rect">
+            <a:avLst/>
+          </a:prstGeom>
+        </p:spPr>
+      </p:pic>
+      <p:sp>
+        <p:nvSpPr>
+          <p:cNvPr id="4" name="TextBox 3"/>
+          <p:cNvSpPr txBox="1"/>
+          <p:nvPr/>
+        </p:nvSpPr>
+        <p:spPr>
+          <a:xfrm>
+            <a:off x="640080" y="6446520"/>
+            <a:ext cx="3657600" cy="228600"/>
+          </a:xfrm>
+          <a:prstGeom prst="rect">
+            <a:avLst/>
+          </a:prstGeom>
+          <a:noFill/>
+        </p:spPr>
+        <p:txBody>
+          <a:bodyPr wrap="none">
+            <a:spAutoFit/>
+          </a:bodyPr>
+          <a:lstStyle/>
+          <a:p>
+            <a:pPr>
+              <a:defRPr sz="900">
+                <a:solidFill>
+                  <a:srgbClr val="888888"/>
+                </a:solidFill>
+                <a:latin typeface="Liberation Sans"/>
+              </a:defRPr>
+            </a:pPr>
+            <a:r>
+              <a:t>bitcoinbushbash.info</a:t>
+            </a:r>
+          </a:p>
+        </p:txBody>
+      </p:sp>
+      <p:sp>
+        <p:nvSpPr>
+          <p:cNvPr id="5" name="TextBox 4"/>
+          <p:cNvSpPr txBox="1"/>
+          <p:nvPr/>
+        </p:nvSpPr>
+        <p:spPr>
+          <a:xfrm>
+            <a:off x="640080" y="228600"/>
+            <a:ext cx="9601200" cy="1005840"/>
+          </a:xfrm>
+          <a:prstGeom prst="rect">
+            <a:avLst/>
+          </a:prstGeom>
+          <a:noFill/>
+        </p:spPr>
+        <p:txBody>
+          <a:bodyPr wrap="none">
+            <a:spAutoFit/>
+          </a:bodyPr>
+          <a:lstStyle/>
+          <a:p>
+            <a:pPr>
+              <a:defRPr sz="4200" b="1">
+                <a:solidFill>
+                  <a:srgbClr val="FFFFFF"/>
+                </a:solidFill>
+                <a:latin typeface="Liberation Sans"/>
+              </a:defRPr>
+            </a:pPr>
+            <a:r>
+              <a:t>References (4/11)</a:t>
+            </a:r>
+          </a:p>
+        </p:txBody>
+      </p:sp>
+      <p:sp>
+        <p:nvSpPr>
+          <p:cNvPr id="6" name="Rectangle 5"/>
+          <p:cNvSpPr/>
+          <p:nvPr/>
+        </p:nvSpPr>
+        <p:spPr>
+          <a:xfrm>
+            <a:off x="640080" y="1234440"/>
+            <a:ext cx="4114800" cy="50292"/>
+          </a:xfrm>
+          <a:prstGeom prst="rect">
+            <a:avLst/>
+          </a:prstGeom>
+          <a:solidFill>
+            <a:srgbClr val="F7931A"/>
+          </a:solidFill>
+          <a:ln>
+            <a:noFill/>
+          </a:ln>
+        </p:spPr>
+        <p:style>
+          <a:lnRef idx="1">
+            <a:schemeClr val="accent1"/>
+          </a:lnRef>
+          <a:fillRef idx="3">
+            <a:schemeClr val="accent1"/>
+          </a:fillRef>
+          <a:effectRef idx="2">
+            <a:schemeClr val="accent1"/>
+          </a:effectRef>
+          <a:fontRef idx="minor">
+            <a:schemeClr val="lt1"/>
+          </a:fontRef>
+        </p:style>
+        <p:txBody>
+          <a:bodyPr rtlCol="0" anchor="ctr"/>
+          <a:lstStyle/>
+          <a:p>
+            <a:pPr algn="ctr"/>
+          </a:p>
+        </p:txBody>
+      </p:sp>
+      <p:sp>
+        <p:nvSpPr>
+          <p:cNvPr id="7" name="TextBox 6"/>
+          <p:cNvSpPr txBox="1"/>
+          <p:nvPr/>
+        </p:nvSpPr>
+        <p:spPr>
+          <a:xfrm>
+            <a:off x="640080" y="1783080"/>
+            <a:ext cx="10972800" cy="4572000"/>
+          </a:xfrm>
+          <a:prstGeom prst="rect">
+            <a:avLst/>
+          </a:prstGeom>
+          <a:noFill/>
+        </p:spPr>
+        <p:txBody>
+          <a:bodyPr wrap="square" lIns="0" rIns="0" tIns="0" bIns="0">
+            <a:spAutoFit/>
+          </a:bodyPr>
+          <a:lstStyle/>
+          <a:p>
+            <a:pPr>
+              <a:spcBef>
+                <a:spcPts val="800"/>
+              </a:spcBef>
+              <a:spcAft>
+                <a:spcPts val="400"/>
+              </a:spcAft>
+              <a:defRPr sz="1800" b="1">
+                <a:solidFill>
+                  <a:srgbClr val="F7931A"/>
+                </a:solidFill>
+                <a:latin typeface="Liberation Sans"/>
+              </a:defRPr>
+            </a:pPr>
+            <a:r>
+              <a:t>QC timeline</a:t>
+            </a:r>
+          </a:p>
+          <a:p>
+            <a:pPr>
+              <a:spcBef>
+                <a:spcPts val="0"/>
+              </a:spcBef>
+              <a:spcAft>
+                <a:spcPts val="100"/>
+              </a:spcAft>
+            </a:pPr>
+            <a:r>
+              <a:rPr sz="1200" b="1">
+                <a:solidFill>
+                  <a:srgbClr val="F5F0E8"/>
+                </a:solidFill>
+                <a:latin typeface="Liberation Sans"/>
+                <a:hlinkClick r:id="rId3"/>
+              </a:rPr>
+              <a:t>13. GRI Quantum Threat Timeline Report 2025</a:t>
+            </a:r>
+          </a:p>
+          <a:p>
+            <a:pPr>
+              <a:spcBef>
+                <a:spcPts val="0"/>
+              </a:spcBef>
+              <a:spcAft>
+                <a:spcPts val="600"/>
+              </a:spcAft>
+            </a:pPr>
+            <a:r>
+              <a:rPr sz="1200" b="0">
+                <a:solidFill>
+                  <a:srgbClr val="888888"/>
+                </a:solidFill>
+                <a:latin typeface="Liberation Sans"/>
+              </a:rPr>
+              <a:t>Annual survey of 26 global quantum experts. Optimistic interpretation: ~49% chance of a CRQC within 10 years; pessimistic: ~28%. Notable upward shift from prior years.</a:t>
+            </a:r>
+          </a:p>
+          <a:p>
+            <a:pPr>
+              <a:spcBef>
+                <a:spcPts val="0"/>
+              </a:spcBef>
+              <a:spcAft>
+                <a:spcPts val="100"/>
+              </a:spcAft>
+            </a:pPr>
+            <a:r>
+              <a:rPr sz="1200" b="1">
+                <a:solidFill>
+                  <a:srgbClr val="F5F0E8"/>
+                </a:solidFill>
+                <a:latin typeface="Liberation Sans"/>
+                <a:hlinkClick r:id="rId4"/>
+              </a:rPr>
+              <a:t>14. Bitcoin Fundamentals: Quantum Computing and Bitcoin</a:t>
+            </a:r>
+          </a:p>
+          <a:p>
+            <a:pPr>
+              <a:spcBef>
+                <a:spcPts val="0"/>
+              </a:spcBef>
+              <a:spcAft>
+                <a:spcPts val="600"/>
+              </a:spcAft>
+            </a:pPr>
+            <a:r>
+              <a:rPr sz="1200" b="0">
+                <a:solidFill>
+                  <a:srgbClr val="888888"/>
+                </a:solidFill>
+                <a:latin typeface="Liberation Sans"/>
+              </a:rPr>
+              <a:t>Podcast episode discussing the quantum threat to Bitcoin with Charles Edwards, covering timelines, risk assessment, and what bitcoiners should know.</a:t>
+            </a:r>
+          </a:p>
+          <a:p>
+            <a:pPr>
+              <a:spcBef>
+                <a:spcPts val="0"/>
+              </a:spcBef>
+              <a:spcAft>
+                <a:spcPts val="100"/>
+              </a:spcAft>
+            </a:pPr>
+            <a:r>
+              <a:rPr sz="1200" b="1">
+                <a:solidFill>
+                  <a:srgbClr val="F5F0E8"/>
+                </a:solidFill>
+                <a:latin typeface="Liberation Sans"/>
+                <a:hlinkClick r:id="rId5"/>
+              </a:rPr>
+              <a:t>15. Cointelegraph: BIP-360 Upgrade Timeline</a:t>
+            </a:r>
+          </a:p>
+          <a:p>
+            <a:pPr>
+              <a:spcBef>
+                <a:spcPts val="0"/>
+              </a:spcBef>
+              <a:spcAft>
+                <a:spcPts val="600"/>
+              </a:spcAft>
+            </a:pPr>
+            <a:r>
+              <a:rPr sz="1200" b="0">
+                <a:solidFill>
+                  <a:srgbClr val="888888"/>
+                </a:solidFill>
+                <a:latin typeface="Liberation Sans"/>
+              </a:rPr>
+              <a:t>BIP-360 co-author estimates Bitcoin may take up to 7 years to fully upgrade to post-quantum signatures under a standard timeline.</a:t>
+            </a:r>
+          </a:p>
+        </p:txBody>
+      </p:sp>
+    </p:spTree>
+  </p:cSld>
+  <p:clrMapOvr>
+    <a:masterClrMapping/>
+  </p:clrMapOvr>
+</p:sld>
+</file>
+
+<file path=ppt/slides/slide28.xml><?xml version="1.0" encoding="utf-8"?>
+<p:sld xmlns:a="http://schemas.openxmlformats.org/drawingml/2006/main" xmlns:p="http://schemas.openxmlformats.org/presentationml/2006/main" xmlns:r="http://schemas.openxmlformats.org/officeDocument/2006/relationships">
+  <p:cSld>
+    <p:spTree>
+      <p:nvGrpSpPr>
+        <p:cNvPr id="1" name=""/>
+        <p:cNvGrpSpPr/>
+        <p:nvPr/>
+      </p:nvGrpSpPr>
+      <p:grpSpPr/>
+      <p:sp>
+        <p:nvSpPr>
+          <p:cNvPr id="2" name="Rectangle 1"/>
+          <p:cNvSpPr/>
+          <p:nvPr/>
+        </p:nvSpPr>
+        <p:spPr>
+          <a:xfrm>
+            <a:off x="0" y="0"/>
+            <a:ext cx="12191695" cy="6858000"/>
+          </a:xfrm>
+          <a:prstGeom prst="rect">
+            <a:avLst/>
+          </a:prstGeom>
+          <a:solidFill>
+            <a:srgbClr val="000000"/>
+          </a:solidFill>
+          <a:ln>
+            <a:noFill/>
+          </a:ln>
+        </p:spPr>
+        <p:style>
+          <a:lnRef idx="1">
+            <a:schemeClr val="accent1"/>
+          </a:lnRef>
+          <a:fillRef idx="3">
+            <a:schemeClr val="accent1"/>
+          </a:fillRef>
+          <a:effectRef idx="2">
+            <a:schemeClr val="accent1"/>
+          </a:effectRef>
+          <a:fontRef idx="minor">
+            <a:schemeClr val="lt1"/>
+          </a:fontRef>
+        </p:style>
+        <p:txBody>
+          <a:bodyPr rtlCol="0" anchor="ctr"/>
+          <a:lstStyle/>
+          <a:p>
+            <a:pPr algn="ctr"/>
+          </a:p>
+        </p:txBody>
+      </p:sp>
+      <p:pic>
+        <p:nvPicPr>
+          <p:cNvPr id="3" name="Picture 2" descr="bitcoinbushbash-logo.png"/>
+          <p:cNvPicPr>
+            <a:picLocks noChangeAspect="1"/>
+          </p:cNvPicPr>
+          <p:nvPr/>
+        </p:nvPicPr>
+        <p:blipFill>
+          <a:blip r:embed="rId2"/>
+          <a:stretch>
+            <a:fillRect/>
+          </a:stretch>
+        </p:blipFill>
+        <p:spPr>
+          <a:xfrm>
+            <a:off x="10698480" y="109728"/>
+            <a:ext cx="1353312" cy="1353312"/>
+          </a:xfrm>
+          <a:prstGeom prst="rect">
+            <a:avLst/>
+          </a:prstGeom>
+        </p:spPr>
+      </p:pic>
+      <p:sp>
+        <p:nvSpPr>
+          <p:cNvPr id="4" name="TextBox 3"/>
+          <p:cNvSpPr txBox="1"/>
+          <p:nvPr/>
+        </p:nvSpPr>
+        <p:spPr>
+          <a:xfrm>
+            <a:off x="640080" y="6446520"/>
+            <a:ext cx="3657600" cy="228600"/>
+          </a:xfrm>
+          <a:prstGeom prst="rect">
+            <a:avLst/>
+          </a:prstGeom>
+          <a:noFill/>
+        </p:spPr>
+        <p:txBody>
+          <a:bodyPr wrap="none">
+            <a:spAutoFit/>
+          </a:bodyPr>
+          <a:lstStyle/>
+          <a:p>
+            <a:pPr>
+              <a:defRPr sz="900">
+                <a:solidFill>
+                  <a:srgbClr val="888888"/>
+                </a:solidFill>
+                <a:latin typeface="Liberation Sans"/>
+              </a:defRPr>
+            </a:pPr>
+            <a:r>
+              <a:t>bitcoinbushbash.info</a:t>
+            </a:r>
+          </a:p>
+        </p:txBody>
+      </p:sp>
+      <p:sp>
+        <p:nvSpPr>
+          <p:cNvPr id="5" name="TextBox 4"/>
+          <p:cNvSpPr txBox="1"/>
+          <p:nvPr/>
+        </p:nvSpPr>
+        <p:spPr>
+          <a:xfrm>
+            <a:off x="640080" y="228600"/>
+            <a:ext cx="9601200" cy="1005840"/>
+          </a:xfrm>
+          <a:prstGeom prst="rect">
+            <a:avLst/>
+          </a:prstGeom>
+          <a:noFill/>
+        </p:spPr>
+        <p:txBody>
+          <a:bodyPr wrap="none">
+            <a:spAutoFit/>
+          </a:bodyPr>
+          <a:lstStyle/>
+          <a:p>
+            <a:pPr>
+              <a:defRPr sz="4200" b="1">
+                <a:solidFill>
+                  <a:srgbClr val="FFFFFF"/>
+                </a:solidFill>
+                <a:latin typeface="Liberation Sans"/>
+              </a:defRPr>
+            </a:pPr>
+            <a:r>
+              <a:t>References (5/11)</a:t>
+            </a:r>
+          </a:p>
+        </p:txBody>
+      </p:sp>
+      <p:sp>
+        <p:nvSpPr>
+          <p:cNvPr id="6" name="Rectangle 5"/>
+          <p:cNvSpPr/>
+          <p:nvPr/>
+        </p:nvSpPr>
+        <p:spPr>
+          <a:xfrm>
+            <a:off x="640080" y="1234440"/>
+            <a:ext cx="4114800" cy="50292"/>
+          </a:xfrm>
+          <a:prstGeom prst="rect">
+            <a:avLst/>
+          </a:prstGeom>
+          <a:solidFill>
+            <a:srgbClr val="F7931A"/>
+          </a:solidFill>
+          <a:ln>
+            <a:noFill/>
+          </a:ln>
+        </p:spPr>
+        <p:style>
+          <a:lnRef idx="1">
+            <a:schemeClr val="accent1"/>
+          </a:lnRef>
+          <a:fillRef idx="3">
+            <a:schemeClr val="accent1"/>
+          </a:fillRef>
+          <a:effectRef idx="2">
+            <a:schemeClr val="accent1"/>
+          </a:effectRef>
+          <a:fontRef idx="minor">
+            <a:schemeClr val="lt1"/>
+          </a:fontRef>
+        </p:style>
+        <p:txBody>
+          <a:bodyPr rtlCol="0" anchor="ctr"/>
+          <a:lstStyle/>
+          <a:p>
+            <a:pPr algn="ctr"/>
+          </a:p>
+        </p:txBody>
+      </p:sp>
+      <p:sp>
+        <p:nvSpPr>
+          <p:cNvPr id="7" name="TextBox 6"/>
+          <p:cNvSpPr txBox="1"/>
+          <p:nvPr/>
+        </p:nvSpPr>
+        <p:spPr>
+          <a:xfrm>
+            <a:off x="640080" y="1783080"/>
+            <a:ext cx="10972800" cy="4572000"/>
+          </a:xfrm>
+          <a:prstGeom prst="rect">
+            <a:avLst/>
+          </a:prstGeom>
+          <a:noFill/>
+        </p:spPr>
+        <p:txBody>
+          <a:bodyPr wrap="square" lIns="0" rIns="0" tIns="0" bIns="0">
+            <a:spAutoFit/>
+          </a:bodyPr>
+          <a:lstStyle/>
+          <a:p>
+            <a:pPr>
+              <a:spcBef>
+                <a:spcPts val="800"/>
+              </a:spcBef>
+              <a:spcAft>
+                <a:spcPts val="400"/>
+              </a:spcAft>
+              <a:defRPr sz="1800" b="1">
+                <a:solidFill>
+                  <a:srgbClr val="F7931A"/>
+                </a:solidFill>
+                <a:latin typeface="Liberation Sans"/>
+              </a:defRPr>
+            </a:pPr>
+            <a:r>
+              <a:t>Technical problem and fixes</a:t>
+            </a:r>
+          </a:p>
+          <a:p>
+            <a:pPr>
+              <a:spcBef>
+                <a:spcPts val="0"/>
+              </a:spcBef>
+              <a:spcAft>
+                <a:spcPts val="100"/>
+              </a:spcAft>
+            </a:pPr>
+            <a:r>
+              <a:rPr sz="1200" b="1">
+                <a:solidFill>
+                  <a:srgbClr val="F5F0E8"/>
+                </a:solidFill>
+                <a:latin typeface="Liberation Sans"/>
+                <a:hlinkClick r:id="rId3"/>
+              </a:rPr>
+              <a:t>16. BIP360.org Overview</a:t>
+            </a:r>
+          </a:p>
+          <a:p>
+            <a:pPr>
+              <a:spcBef>
+                <a:spcPts val="0"/>
+              </a:spcBef>
+              <a:spcAft>
+                <a:spcPts val="600"/>
+              </a:spcAft>
+            </a:pPr>
+            <a:r>
+              <a:rPr sz="1200" b="0">
+                <a:solidFill>
+                  <a:srgbClr val="888888"/>
+                </a:solidFill>
+                <a:latin typeface="Liberation Sans"/>
+              </a:rPr>
+              <a:t>Overview of Pay-to-Merkle-Root (P2MR), a new output type that removes the quantum-vulnerable key path spend from Taproot while preserving script tree functionality.</a:t>
+            </a:r>
+          </a:p>
+          <a:p>
+            <a:pPr>
+              <a:spcBef>
+                <a:spcPts val="0"/>
+              </a:spcBef>
+              <a:spcAft>
+                <a:spcPts val="100"/>
+              </a:spcAft>
+            </a:pPr>
+            <a:r>
+              <a:rPr sz="1200" b="1">
+                <a:solidFill>
+                  <a:srgbClr val="F5F0E8"/>
+                </a:solidFill>
+                <a:latin typeface="Liberation Sans"/>
+                <a:hlinkClick r:id="rId4"/>
+              </a:rPr>
+              <a:t>17. BIP-360 Draft: Pay-to-Merkle-Root</a:t>
+            </a:r>
+          </a:p>
+          <a:p>
+            <a:pPr>
+              <a:spcBef>
+                <a:spcPts val="0"/>
+              </a:spcBef>
+              <a:spcAft>
+                <a:spcPts val="600"/>
+              </a:spcAft>
+            </a:pPr>
+            <a:r>
+              <a:rPr sz="1200" b="0">
+                <a:solidFill>
+                  <a:srgbClr val="888888"/>
+                </a:solidFill>
+                <a:latin typeface="Liberation Sans"/>
+              </a:rPr>
+              <a:t>The formal BIP specification for P2MR, detailing address format (bc1z...), witness structure, and security rationale against long exposure quantum attacks.</a:t>
+            </a:r>
+          </a:p>
+        </p:txBody>
+      </p:sp>
+    </p:spTree>
+  </p:cSld>
+  <p:clrMapOvr>
+    <a:masterClrMapping/>
+  </p:clrMapOvr>
+</p:sld>
+</file>
+
+<file path=ppt/slides/slide29.xml><?xml version="1.0" encoding="utf-8"?>
+<p:sld xmlns:a="http://schemas.openxmlformats.org/drawingml/2006/main" xmlns:p="http://schemas.openxmlformats.org/presentationml/2006/main" xmlns:r="http://schemas.openxmlformats.org/officeDocument/2006/relationships">
+  <p:cSld>
+    <p:spTree>
+      <p:nvGrpSpPr>
+        <p:cNvPr id="1" name=""/>
+        <p:cNvGrpSpPr/>
+        <p:nvPr/>
+      </p:nvGrpSpPr>
+      <p:grpSpPr/>
+      <p:sp>
+        <p:nvSpPr>
+          <p:cNvPr id="2" name="Rectangle 1"/>
+          <p:cNvSpPr/>
+          <p:nvPr/>
+        </p:nvSpPr>
+        <p:spPr>
+          <a:xfrm>
+            <a:off x="0" y="0"/>
+            <a:ext cx="12191695" cy="6858000"/>
+          </a:xfrm>
+          <a:prstGeom prst="rect">
+            <a:avLst/>
+          </a:prstGeom>
+          <a:solidFill>
+            <a:srgbClr val="000000"/>
+          </a:solidFill>
+          <a:ln>
+            <a:noFill/>
+          </a:ln>
+        </p:spPr>
+        <p:style>
+          <a:lnRef idx="1">
+            <a:schemeClr val="accent1"/>
+          </a:lnRef>
+          <a:fillRef idx="3">
+            <a:schemeClr val="accent1"/>
+          </a:fillRef>
+          <a:effectRef idx="2">
+            <a:schemeClr val="accent1"/>
+          </a:effectRef>
+          <a:fontRef idx="minor">
+            <a:schemeClr val="lt1"/>
+          </a:fontRef>
+        </p:style>
+        <p:txBody>
+          <a:bodyPr rtlCol="0" anchor="ctr"/>
+          <a:lstStyle/>
+          <a:p>
+            <a:pPr algn="ctr"/>
+          </a:p>
+        </p:txBody>
+      </p:sp>
+      <p:pic>
+        <p:nvPicPr>
+          <p:cNvPr id="3" name="Picture 2" descr="bitcoinbushbash-logo.png"/>
+          <p:cNvPicPr>
+            <a:picLocks noChangeAspect="1"/>
+          </p:cNvPicPr>
+          <p:nvPr/>
+        </p:nvPicPr>
+        <p:blipFill>
+          <a:blip r:embed="rId2"/>
+          <a:stretch>
+            <a:fillRect/>
+          </a:stretch>
+        </p:blipFill>
+        <p:spPr>
+          <a:xfrm>
+            <a:off x="10698480" y="109728"/>
+            <a:ext cx="1353312" cy="1353312"/>
+          </a:xfrm>
+          <a:prstGeom prst="rect">
+            <a:avLst/>
+          </a:prstGeom>
+        </p:spPr>
+      </p:pic>
+      <p:sp>
+        <p:nvSpPr>
+          <p:cNvPr id="4" name="TextBox 3"/>
+          <p:cNvSpPr txBox="1"/>
+          <p:nvPr/>
+        </p:nvSpPr>
+        <p:spPr>
+          <a:xfrm>
+            <a:off x="640080" y="6446520"/>
+            <a:ext cx="3657600" cy="228600"/>
+          </a:xfrm>
+          <a:prstGeom prst="rect">
+            <a:avLst/>
+          </a:prstGeom>
+          <a:noFill/>
+        </p:spPr>
+        <p:txBody>
+          <a:bodyPr wrap="none">
+            <a:spAutoFit/>
+          </a:bodyPr>
+          <a:lstStyle/>
+          <a:p>
+            <a:pPr>
+              <a:defRPr sz="900">
+                <a:solidFill>
+                  <a:srgbClr val="888888"/>
+                </a:solidFill>
+                <a:latin typeface="Liberation Sans"/>
+              </a:defRPr>
+            </a:pPr>
+            <a:r>
+              <a:t>bitcoinbushbash.info</a:t>
+            </a:r>
+          </a:p>
+        </p:txBody>
+      </p:sp>
+      <p:sp>
+        <p:nvSpPr>
+          <p:cNvPr id="5" name="TextBox 4"/>
+          <p:cNvSpPr txBox="1"/>
+          <p:nvPr/>
+        </p:nvSpPr>
+        <p:spPr>
+          <a:xfrm>
+            <a:off x="640080" y="228600"/>
+            <a:ext cx="9601200" cy="1005840"/>
+          </a:xfrm>
+          <a:prstGeom prst="rect">
+            <a:avLst/>
+          </a:prstGeom>
+          <a:noFill/>
+        </p:spPr>
+        <p:txBody>
+          <a:bodyPr wrap="none">
+            <a:spAutoFit/>
+          </a:bodyPr>
+          <a:lstStyle/>
+          <a:p>
+            <a:pPr>
+              <a:defRPr sz="4200" b="1">
+                <a:solidFill>
+                  <a:srgbClr val="FFFFFF"/>
+                </a:solidFill>
+                <a:latin typeface="Liberation Sans"/>
+              </a:defRPr>
+            </a:pPr>
+            <a:r>
+              <a:t>References (6/11)</a:t>
+            </a:r>
+          </a:p>
+        </p:txBody>
+      </p:sp>
+      <p:sp>
+        <p:nvSpPr>
+          <p:cNvPr id="6" name="Rectangle 5"/>
+          <p:cNvSpPr/>
+          <p:nvPr/>
+        </p:nvSpPr>
+        <p:spPr>
+          <a:xfrm>
+            <a:off x="640080" y="1234440"/>
+            <a:ext cx="4114800" cy="50292"/>
+          </a:xfrm>
+          <a:prstGeom prst="rect">
+            <a:avLst/>
+          </a:prstGeom>
+          <a:solidFill>
+            <a:srgbClr val="F7931A"/>
+          </a:solidFill>
+          <a:ln>
+            <a:noFill/>
+          </a:ln>
+        </p:spPr>
+        <p:style>
+          <a:lnRef idx="1">
+            <a:schemeClr val="accent1"/>
+          </a:lnRef>
+          <a:fillRef idx="3">
+            <a:schemeClr val="accent1"/>
+          </a:fillRef>
+          <a:effectRef idx="2">
+            <a:schemeClr val="accent1"/>
+          </a:effectRef>
+          <a:fontRef idx="minor">
+            <a:schemeClr val="lt1"/>
+          </a:fontRef>
+        </p:style>
+        <p:txBody>
+          <a:bodyPr rtlCol="0" anchor="ctr"/>
+          <a:lstStyle/>
+          <a:p>
+            <a:pPr algn="ctr"/>
+          </a:p>
+        </p:txBody>
+      </p:sp>
+      <p:sp>
+        <p:nvSpPr>
+          <p:cNvPr id="7" name="TextBox 6"/>
+          <p:cNvSpPr txBox="1"/>
+          <p:nvPr/>
+        </p:nvSpPr>
+        <p:spPr>
+          <a:xfrm>
+            <a:off x="640080" y="1783080"/>
+            <a:ext cx="10972800" cy="4572000"/>
+          </a:xfrm>
+          <a:prstGeom prst="rect">
+            <a:avLst/>
+          </a:prstGeom>
+          <a:noFill/>
+        </p:spPr>
+        <p:txBody>
+          <a:bodyPr wrap="square" lIns="0" rIns="0" tIns="0" bIns="0">
+            <a:spAutoFit/>
+          </a:bodyPr>
+          <a:lstStyle/>
+          <a:p>
+            <a:pPr>
+              <a:spcBef>
+                <a:spcPts val="0"/>
+              </a:spcBef>
+              <a:spcAft>
+                <a:spcPts val="100"/>
+              </a:spcAft>
+            </a:pPr>
+            <a:r>
+              <a:rPr sz="1200" b="1">
+                <a:solidFill>
+                  <a:srgbClr val="F5F0E8"/>
+                </a:solidFill>
+                <a:latin typeface="Liberation Sans"/>
+                <a:hlinkClick r:id="rId3"/>
+              </a:rPr>
+              <a:t>18. BitMEX Research: Taproot Quantum Spend Paths</a:t>
+            </a:r>
+          </a:p>
+          <a:p>
+            <a:pPr>
+              <a:spcBef>
+                <a:spcPts val="0"/>
+              </a:spcBef>
+              <a:spcAft>
+                <a:spcPts val="600"/>
+              </a:spcAft>
+            </a:pPr>
+            <a:r>
+              <a:rPr sz="1200" b="0">
+                <a:solidFill>
+                  <a:srgbClr val="888888"/>
+                </a:solidFill>
+                <a:latin typeface="Liberation Sans"/>
+              </a:rPr>
+              <a:t>Proposes dual-path Taproot wallets with both quantum-safe and classical spend paths, arguing these wallets should be exempt from any future coin freeze.</a:t>
+            </a:r>
+          </a:p>
+          <a:p>
+            <a:pPr>
+              <a:spcBef>
+                <a:spcPts val="0"/>
+              </a:spcBef>
+              <a:spcAft>
+                <a:spcPts val="100"/>
+              </a:spcAft>
+            </a:pPr>
+            <a:r>
+              <a:rPr sz="1200" b="1">
+                <a:solidFill>
+                  <a:srgbClr val="F5F0E8"/>
+                </a:solidFill>
+                <a:latin typeface="Liberation Sans"/>
+                <a:hlinkClick r:id="rId4"/>
+              </a:rPr>
+              <a:t>19. Cointelegraph: Six Quantum Security Challenges</a:t>
+            </a:r>
+          </a:p>
+          <a:p>
+            <a:pPr>
+              <a:spcBef>
+                <a:spcPts val="0"/>
+              </a:spcBef>
+              <a:spcAft>
+                <a:spcPts val="600"/>
+              </a:spcAft>
+            </a:pPr>
+            <a:r>
+              <a:rPr sz="1200" b="0">
+                <a:solidFill>
+                  <a:srgbClr val="888888"/>
+                </a:solidFill>
+                <a:latin typeface="Liberation Sans"/>
+              </a:rPr>
+              <a:t>Outlines six major hurdles Bitcoin faces in becoming quantum-resistant, including signature size bloat, consensus changes, and migration logistics.</a:t>
+            </a:r>
+          </a:p>
+          <a:p>
+            <a:pPr>
+              <a:spcBef>
+                <a:spcPts val="0"/>
+              </a:spcBef>
+              <a:spcAft>
+                <a:spcPts val="100"/>
+              </a:spcAft>
+            </a:pPr>
+            <a:r>
+              <a:rPr sz="1200" b="1">
+                <a:solidFill>
+                  <a:srgbClr val="F5F0E8"/>
+                </a:solidFill>
+                <a:latin typeface="Liberation Sans"/>
+                <a:hlinkClick r:id="rId5"/>
+              </a:rPr>
+              <a:t>20. Bitcoin Magazine: Bitcoin Advances Toward Quantum Resistance</a:t>
+            </a:r>
+          </a:p>
+          <a:p>
+            <a:pPr>
+              <a:spcBef>
+                <a:spcPts val="0"/>
+              </a:spcBef>
+              <a:spcAft>
+                <a:spcPts val="600"/>
+              </a:spcAft>
+            </a:pPr>
+            <a:r>
+              <a:rPr sz="1200" b="0">
+                <a:solidFill>
+                  <a:srgbClr val="888888"/>
+                </a:solidFill>
+                <a:latin typeface="Liberation Sans"/>
+              </a:rPr>
+              <a:t>Reports on recent development progress toward quantum-resistant Bitcoin, including BIP-360 and related proposals.</a:t>
+            </a:r>
+          </a:p>
+          <a:p>
+            <a:pPr>
+              <a:spcBef>
+                <a:spcPts val="0"/>
+              </a:spcBef>
+              <a:spcAft>
+                <a:spcPts val="100"/>
+              </a:spcAft>
+            </a:pPr>
+            <a:r>
+              <a:rPr sz="1200" b="1">
+                <a:solidFill>
+                  <a:srgbClr val="F5F0E8"/>
+                </a:solidFill>
+                <a:latin typeface="Liberation Sans"/>
+                <a:hlinkClick r:id="rId6"/>
+              </a:rPr>
+              <a:t>21. NIST FIPS 204: ML-DSA</a:t>
+            </a:r>
+          </a:p>
+          <a:p>
+            <a:pPr>
+              <a:spcBef>
+                <a:spcPts val="0"/>
+              </a:spcBef>
+              <a:spcAft>
+                <a:spcPts val="600"/>
+              </a:spcAft>
+            </a:pPr>
+            <a:r>
+              <a:rPr sz="1200" b="0">
+                <a:solidFill>
+                  <a:srgbClr val="888888"/>
+                </a:solidFill>
+                <a:latin typeface="Liberation Sans"/>
+              </a:rPr>
+              <a:t>NIST's finalised standard for ML-DSA (derived from CRYSTALS-Dilithium), a lattice-based post-quantum digital signature algorithm.</a:t>
+            </a:r>
+          </a:p>
+          <a:p>
+            <a:pPr>
+              <a:spcBef>
+                <a:spcPts val="0"/>
+              </a:spcBef>
+              <a:spcAft>
+                <a:spcPts val="100"/>
+              </a:spcAft>
+            </a:pPr>
+            <a:r>
+              <a:rPr sz="1200" b="1">
+                <a:solidFill>
+                  <a:srgbClr val="F5F0E8"/>
+                </a:solidFill>
+                <a:latin typeface="Liberation Sans"/>
+                <a:hlinkClick r:id="rId7"/>
+              </a:rPr>
+              <a:t>22. NIST FIPS 205: SLH-DSA</a:t>
+            </a:r>
+          </a:p>
+          <a:p>
+            <a:pPr>
+              <a:spcBef>
+                <a:spcPts val="0"/>
+              </a:spcBef>
+              <a:spcAft>
+                <a:spcPts val="600"/>
+              </a:spcAft>
+            </a:pPr>
+            <a:r>
+              <a:rPr sz="1200" b="0">
+                <a:solidFill>
+                  <a:srgbClr val="888888"/>
+                </a:solidFill>
+                <a:latin typeface="Liberation Sans"/>
+              </a:rPr>
+              <a:t>NIST's finalised standard for SLH-DSA (derived from SPHINCS+), a stateless hash-based post-quantum digital signature algorithm.</a:t>
             </a:r>
           </a:p>
         </p:txBody>
@@ -13547,6 +15617,2012 @@
             </a:pPr>
             <a:r>
               <a:t>Logical qubits + runtime = can it run Shor fast enough?</a:t>
+            </a:r>
+          </a:p>
+        </p:txBody>
+      </p:sp>
+    </p:spTree>
+  </p:cSld>
+  <p:clrMapOvr>
+    <a:masterClrMapping/>
+  </p:clrMapOvr>
+</p:sld>
+</file>
+
+<file path=ppt/slides/slide30.xml><?xml version="1.0" encoding="utf-8"?>
+<p:sld xmlns:a="http://schemas.openxmlformats.org/drawingml/2006/main" xmlns:p="http://schemas.openxmlformats.org/presentationml/2006/main" xmlns:r="http://schemas.openxmlformats.org/officeDocument/2006/relationships">
+  <p:cSld>
+    <p:spTree>
+      <p:nvGrpSpPr>
+        <p:cNvPr id="1" name=""/>
+        <p:cNvGrpSpPr/>
+        <p:nvPr/>
+      </p:nvGrpSpPr>
+      <p:grpSpPr/>
+      <p:sp>
+        <p:nvSpPr>
+          <p:cNvPr id="2" name="Rectangle 1"/>
+          <p:cNvSpPr/>
+          <p:nvPr/>
+        </p:nvSpPr>
+        <p:spPr>
+          <a:xfrm>
+            <a:off x="0" y="0"/>
+            <a:ext cx="12191695" cy="6858000"/>
+          </a:xfrm>
+          <a:prstGeom prst="rect">
+            <a:avLst/>
+          </a:prstGeom>
+          <a:solidFill>
+            <a:srgbClr val="000000"/>
+          </a:solidFill>
+          <a:ln>
+            <a:noFill/>
+          </a:ln>
+        </p:spPr>
+        <p:style>
+          <a:lnRef idx="1">
+            <a:schemeClr val="accent1"/>
+          </a:lnRef>
+          <a:fillRef idx="3">
+            <a:schemeClr val="accent1"/>
+          </a:fillRef>
+          <a:effectRef idx="2">
+            <a:schemeClr val="accent1"/>
+          </a:effectRef>
+          <a:fontRef idx="minor">
+            <a:schemeClr val="lt1"/>
+          </a:fontRef>
+        </p:style>
+        <p:txBody>
+          <a:bodyPr rtlCol="0" anchor="ctr"/>
+          <a:lstStyle/>
+          <a:p>
+            <a:pPr algn="ctr"/>
+          </a:p>
+        </p:txBody>
+      </p:sp>
+      <p:pic>
+        <p:nvPicPr>
+          <p:cNvPr id="3" name="Picture 2" descr="bitcoinbushbash-logo.png"/>
+          <p:cNvPicPr>
+            <a:picLocks noChangeAspect="1"/>
+          </p:cNvPicPr>
+          <p:nvPr/>
+        </p:nvPicPr>
+        <p:blipFill>
+          <a:blip r:embed="rId2"/>
+          <a:stretch>
+            <a:fillRect/>
+          </a:stretch>
+        </p:blipFill>
+        <p:spPr>
+          <a:xfrm>
+            <a:off x="10698480" y="109728"/>
+            <a:ext cx="1353312" cy="1353312"/>
+          </a:xfrm>
+          <a:prstGeom prst="rect">
+            <a:avLst/>
+          </a:prstGeom>
+        </p:spPr>
+      </p:pic>
+      <p:sp>
+        <p:nvSpPr>
+          <p:cNvPr id="4" name="TextBox 3"/>
+          <p:cNvSpPr txBox="1"/>
+          <p:nvPr/>
+        </p:nvSpPr>
+        <p:spPr>
+          <a:xfrm>
+            <a:off x="640080" y="6446520"/>
+            <a:ext cx="3657600" cy="228600"/>
+          </a:xfrm>
+          <a:prstGeom prst="rect">
+            <a:avLst/>
+          </a:prstGeom>
+          <a:noFill/>
+        </p:spPr>
+        <p:txBody>
+          <a:bodyPr wrap="none">
+            <a:spAutoFit/>
+          </a:bodyPr>
+          <a:lstStyle/>
+          <a:p>
+            <a:pPr>
+              <a:defRPr sz="900">
+                <a:solidFill>
+                  <a:srgbClr val="888888"/>
+                </a:solidFill>
+                <a:latin typeface="Liberation Sans"/>
+              </a:defRPr>
+            </a:pPr>
+            <a:r>
+              <a:t>bitcoinbushbash.info</a:t>
+            </a:r>
+          </a:p>
+        </p:txBody>
+      </p:sp>
+      <p:sp>
+        <p:nvSpPr>
+          <p:cNvPr id="5" name="TextBox 4"/>
+          <p:cNvSpPr txBox="1"/>
+          <p:nvPr/>
+        </p:nvSpPr>
+        <p:spPr>
+          <a:xfrm>
+            <a:off x="640080" y="228600"/>
+            <a:ext cx="9601200" cy="1005840"/>
+          </a:xfrm>
+          <a:prstGeom prst="rect">
+            <a:avLst/>
+          </a:prstGeom>
+          <a:noFill/>
+        </p:spPr>
+        <p:txBody>
+          <a:bodyPr wrap="none">
+            <a:spAutoFit/>
+          </a:bodyPr>
+          <a:lstStyle/>
+          <a:p>
+            <a:pPr>
+              <a:defRPr sz="4200" b="1">
+                <a:solidFill>
+                  <a:srgbClr val="FFFFFF"/>
+                </a:solidFill>
+                <a:latin typeface="Liberation Sans"/>
+              </a:defRPr>
+            </a:pPr>
+            <a:r>
+              <a:t>References (7/11)</a:t>
+            </a:r>
+          </a:p>
+        </p:txBody>
+      </p:sp>
+      <p:sp>
+        <p:nvSpPr>
+          <p:cNvPr id="6" name="Rectangle 5"/>
+          <p:cNvSpPr/>
+          <p:nvPr/>
+        </p:nvSpPr>
+        <p:spPr>
+          <a:xfrm>
+            <a:off x="640080" y="1234440"/>
+            <a:ext cx="4114800" cy="50292"/>
+          </a:xfrm>
+          <a:prstGeom prst="rect">
+            <a:avLst/>
+          </a:prstGeom>
+          <a:solidFill>
+            <a:srgbClr val="F7931A"/>
+          </a:solidFill>
+          <a:ln>
+            <a:noFill/>
+          </a:ln>
+        </p:spPr>
+        <p:style>
+          <a:lnRef idx="1">
+            <a:schemeClr val="accent1"/>
+          </a:lnRef>
+          <a:fillRef idx="3">
+            <a:schemeClr val="accent1"/>
+          </a:fillRef>
+          <a:effectRef idx="2">
+            <a:schemeClr val="accent1"/>
+          </a:effectRef>
+          <a:fontRef idx="minor">
+            <a:schemeClr val="lt1"/>
+          </a:fontRef>
+        </p:style>
+        <p:txBody>
+          <a:bodyPr rtlCol="0" anchor="ctr"/>
+          <a:lstStyle/>
+          <a:p>
+            <a:pPr algn="ctr"/>
+          </a:p>
+        </p:txBody>
+      </p:sp>
+      <p:sp>
+        <p:nvSpPr>
+          <p:cNvPr id="7" name="TextBox 6"/>
+          <p:cNvSpPr txBox="1"/>
+          <p:nvPr/>
+        </p:nvSpPr>
+        <p:spPr>
+          <a:xfrm>
+            <a:off x="640080" y="1783080"/>
+            <a:ext cx="10972800" cy="4572000"/>
+          </a:xfrm>
+          <a:prstGeom prst="rect">
+            <a:avLst/>
+          </a:prstGeom>
+          <a:noFill/>
+        </p:spPr>
+        <p:txBody>
+          <a:bodyPr wrap="square" lIns="0" rIns="0" tIns="0" bIns="0">
+            <a:spAutoFit/>
+          </a:bodyPr>
+          <a:lstStyle/>
+          <a:p>
+            <a:pPr>
+              <a:spcBef>
+                <a:spcPts val="0"/>
+              </a:spcBef>
+              <a:spcAft>
+                <a:spcPts val="100"/>
+              </a:spcAft>
+            </a:pPr>
+            <a:r>
+              <a:rPr sz="1200" b="1">
+                <a:solidFill>
+                  <a:srgbClr val="F5F0E8"/>
+                </a:solidFill>
+                <a:latin typeface="Liberation Sans"/>
+                <a:hlinkClick r:id="rId3"/>
+              </a:rPr>
+              <a:t>23. Post-Quantum Digital Signatures Benchmark: ML-DSA vs ECDSA</a:t>
+            </a:r>
+          </a:p>
+          <a:p>
+            <a:pPr>
+              <a:spcBef>
+                <a:spcPts val="0"/>
+              </a:spcBef>
+              <a:spcAft>
+                <a:spcPts val="600"/>
+              </a:spcAft>
+            </a:pPr>
+            <a:r>
+              <a:rPr sz="1200" b="0">
+                <a:solidFill>
+                  <a:srgbClr val="888888"/>
+                </a:solidFill>
+                <a:latin typeface="Liberation Sans"/>
+              </a:rPr>
+              <a:t>Side-by-side performance benchmarks comparing ML-DSA signature sizes, signing times, and verification times against classical ECDSA.</a:t>
+            </a:r>
+          </a:p>
+          <a:p>
+            <a:pPr>
+              <a:spcBef>
+                <a:spcPts val="0"/>
+              </a:spcBef>
+              <a:spcAft>
+                <a:spcPts val="100"/>
+              </a:spcAft>
+            </a:pPr>
+            <a:r>
+              <a:rPr sz="1200" b="1">
+                <a:solidFill>
+                  <a:srgbClr val="F5F0E8"/>
+                </a:solidFill>
+                <a:latin typeface="Liberation Sans"/>
+                <a:hlinkClick r:id="rId4"/>
+              </a:rPr>
+              <a:t>24. ASecuritySite: Digital Signature Benchmark</a:t>
+            </a:r>
+          </a:p>
+          <a:p>
+            <a:pPr>
+              <a:spcBef>
+                <a:spcPts val="0"/>
+              </a:spcBef>
+              <a:spcAft>
+                <a:spcPts val="600"/>
+              </a:spcAft>
+            </a:pPr>
+            <a:r>
+              <a:rPr sz="1200" b="0">
+                <a:solidFill>
+                  <a:srgbClr val="888888"/>
+                </a:solidFill>
+                <a:latin typeface="Liberation Sans"/>
+              </a:rPr>
+              <a:t>Interactive benchmarking tool for post-quantum signature schemes including Dilithium/ML-DSA across different security levels.</a:t>
+            </a:r>
+          </a:p>
+          <a:p>
+            <a:pPr>
+              <a:spcBef>
+                <a:spcPts val="0"/>
+              </a:spcBef>
+              <a:spcAft>
+                <a:spcPts val="100"/>
+              </a:spcAft>
+            </a:pPr>
+            <a:r>
+              <a:rPr sz="1200" b="1">
+                <a:solidFill>
+                  <a:srgbClr val="F5F0E8"/>
+                </a:solidFill>
+                <a:latin typeface="Liberation Sans"/>
+                <a:hlinkClick r:id="rId5"/>
+              </a:rPr>
+              <a:t>25. Making SLH-DSA 10x-100x Faster</a:t>
+            </a:r>
+          </a:p>
+          <a:p>
+            <a:pPr>
+              <a:spcBef>
+                <a:spcPts val="0"/>
+              </a:spcBef>
+              <a:spcAft>
+                <a:spcPts val="600"/>
+              </a:spcAft>
+            </a:pPr>
+            <a:r>
+              <a:rPr sz="1200" b="0">
+                <a:solidFill>
+                  <a:srgbClr val="888888"/>
+                </a:solidFill>
+                <a:latin typeface="Liberation Sans"/>
+              </a:rPr>
+              <a:t>Research by SLH-DSA co-designer Andreas Huelsing on optimisation techniques to dramatically improve SLH-DSA signing and verification performance.</a:t>
+            </a:r>
+          </a:p>
+        </p:txBody>
+      </p:sp>
+    </p:spTree>
+  </p:cSld>
+  <p:clrMapOvr>
+    <a:masterClrMapping/>
+  </p:clrMapOvr>
+</p:sld>
+</file>
+
+<file path=ppt/slides/slide31.xml><?xml version="1.0" encoding="utf-8"?>
+<p:sld xmlns:a="http://schemas.openxmlformats.org/drawingml/2006/main" xmlns:p="http://schemas.openxmlformats.org/presentationml/2006/main" xmlns:r="http://schemas.openxmlformats.org/officeDocument/2006/relationships">
+  <p:cSld>
+    <p:spTree>
+      <p:nvGrpSpPr>
+        <p:cNvPr id="1" name=""/>
+        <p:cNvGrpSpPr/>
+        <p:nvPr/>
+      </p:nvGrpSpPr>
+      <p:grpSpPr/>
+      <p:sp>
+        <p:nvSpPr>
+          <p:cNvPr id="2" name="Rectangle 1"/>
+          <p:cNvSpPr/>
+          <p:nvPr/>
+        </p:nvSpPr>
+        <p:spPr>
+          <a:xfrm>
+            <a:off x="0" y="0"/>
+            <a:ext cx="12191695" cy="6858000"/>
+          </a:xfrm>
+          <a:prstGeom prst="rect">
+            <a:avLst/>
+          </a:prstGeom>
+          <a:solidFill>
+            <a:srgbClr val="000000"/>
+          </a:solidFill>
+          <a:ln>
+            <a:noFill/>
+          </a:ln>
+        </p:spPr>
+        <p:style>
+          <a:lnRef idx="1">
+            <a:schemeClr val="accent1"/>
+          </a:lnRef>
+          <a:fillRef idx="3">
+            <a:schemeClr val="accent1"/>
+          </a:fillRef>
+          <a:effectRef idx="2">
+            <a:schemeClr val="accent1"/>
+          </a:effectRef>
+          <a:fontRef idx="minor">
+            <a:schemeClr val="lt1"/>
+          </a:fontRef>
+        </p:style>
+        <p:txBody>
+          <a:bodyPr rtlCol="0" anchor="ctr"/>
+          <a:lstStyle/>
+          <a:p>
+            <a:pPr algn="ctr"/>
+          </a:p>
+        </p:txBody>
+      </p:sp>
+      <p:pic>
+        <p:nvPicPr>
+          <p:cNvPr id="3" name="Picture 2" descr="bitcoinbushbash-logo.png"/>
+          <p:cNvPicPr>
+            <a:picLocks noChangeAspect="1"/>
+          </p:cNvPicPr>
+          <p:nvPr/>
+        </p:nvPicPr>
+        <p:blipFill>
+          <a:blip r:embed="rId2"/>
+          <a:stretch>
+            <a:fillRect/>
+          </a:stretch>
+        </p:blipFill>
+        <p:spPr>
+          <a:xfrm>
+            <a:off x="10698480" y="109728"/>
+            <a:ext cx="1353312" cy="1353312"/>
+          </a:xfrm>
+          <a:prstGeom prst="rect">
+            <a:avLst/>
+          </a:prstGeom>
+        </p:spPr>
+      </p:pic>
+      <p:sp>
+        <p:nvSpPr>
+          <p:cNvPr id="4" name="TextBox 3"/>
+          <p:cNvSpPr txBox="1"/>
+          <p:nvPr/>
+        </p:nvSpPr>
+        <p:spPr>
+          <a:xfrm>
+            <a:off x="640080" y="6446520"/>
+            <a:ext cx="3657600" cy="228600"/>
+          </a:xfrm>
+          <a:prstGeom prst="rect">
+            <a:avLst/>
+          </a:prstGeom>
+          <a:noFill/>
+        </p:spPr>
+        <p:txBody>
+          <a:bodyPr wrap="none">
+            <a:spAutoFit/>
+          </a:bodyPr>
+          <a:lstStyle/>
+          <a:p>
+            <a:pPr>
+              <a:defRPr sz="900">
+                <a:solidFill>
+                  <a:srgbClr val="888888"/>
+                </a:solidFill>
+                <a:latin typeface="Liberation Sans"/>
+              </a:defRPr>
+            </a:pPr>
+            <a:r>
+              <a:t>bitcoinbushbash.info</a:t>
+            </a:r>
+          </a:p>
+        </p:txBody>
+      </p:sp>
+      <p:sp>
+        <p:nvSpPr>
+          <p:cNvPr id="5" name="TextBox 4"/>
+          <p:cNvSpPr txBox="1"/>
+          <p:nvPr/>
+        </p:nvSpPr>
+        <p:spPr>
+          <a:xfrm>
+            <a:off x="640080" y="228600"/>
+            <a:ext cx="9601200" cy="1005840"/>
+          </a:xfrm>
+          <a:prstGeom prst="rect">
+            <a:avLst/>
+          </a:prstGeom>
+          <a:noFill/>
+        </p:spPr>
+        <p:txBody>
+          <a:bodyPr wrap="none">
+            <a:spAutoFit/>
+          </a:bodyPr>
+          <a:lstStyle/>
+          <a:p>
+            <a:pPr>
+              <a:defRPr sz="4200" b="1">
+                <a:solidFill>
+                  <a:srgbClr val="FFFFFF"/>
+                </a:solidFill>
+                <a:latin typeface="Liberation Sans"/>
+              </a:defRPr>
+            </a:pPr>
+            <a:r>
+              <a:t>References (8/11)</a:t>
+            </a:r>
+          </a:p>
+        </p:txBody>
+      </p:sp>
+      <p:sp>
+        <p:nvSpPr>
+          <p:cNvPr id="6" name="Rectangle 5"/>
+          <p:cNvSpPr/>
+          <p:nvPr/>
+        </p:nvSpPr>
+        <p:spPr>
+          <a:xfrm>
+            <a:off x="640080" y="1234440"/>
+            <a:ext cx="4114800" cy="50292"/>
+          </a:xfrm>
+          <a:prstGeom prst="rect">
+            <a:avLst/>
+          </a:prstGeom>
+          <a:solidFill>
+            <a:srgbClr val="F7931A"/>
+          </a:solidFill>
+          <a:ln>
+            <a:noFill/>
+          </a:ln>
+        </p:spPr>
+        <p:style>
+          <a:lnRef idx="1">
+            <a:schemeClr val="accent1"/>
+          </a:lnRef>
+          <a:fillRef idx="3">
+            <a:schemeClr val="accent1"/>
+          </a:fillRef>
+          <a:effectRef idx="2">
+            <a:schemeClr val="accent1"/>
+          </a:effectRef>
+          <a:fontRef idx="minor">
+            <a:schemeClr val="lt1"/>
+          </a:fontRef>
+        </p:style>
+        <p:txBody>
+          <a:bodyPr rtlCol="0" anchor="ctr"/>
+          <a:lstStyle/>
+          <a:p>
+            <a:pPr algn="ctr"/>
+          </a:p>
+        </p:txBody>
+      </p:sp>
+      <p:sp>
+        <p:nvSpPr>
+          <p:cNvPr id="7" name="TextBox 6"/>
+          <p:cNvSpPr txBox="1"/>
+          <p:nvPr/>
+        </p:nvSpPr>
+        <p:spPr>
+          <a:xfrm>
+            <a:off x="640080" y="1783080"/>
+            <a:ext cx="10972800" cy="4572000"/>
+          </a:xfrm>
+          <a:prstGeom prst="rect">
+            <a:avLst/>
+          </a:prstGeom>
+          <a:noFill/>
+        </p:spPr>
+        <p:txBody>
+          <a:bodyPr wrap="square" lIns="0" rIns="0" tIns="0" bIns="0">
+            <a:spAutoFit/>
+          </a:bodyPr>
+          <a:lstStyle/>
+          <a:p>
+            <a:pPr>
+              <a:spcBef>
+                <a:spcPts val="0"/>
+              </a:spcBef>
+              <a:spcAft>
+                <a:spcPts val="100"/>
+              </a:spcAft>
+            </a:pPr>
+            <a:r>
+              <a:rPr sz="1200" b="1">
+                <a:solidFill>
+                  <a:srgbClr val="F5F0E8"/>
+                </a:solidFill>
+                <a:latin typeface="Liberation Sans"/>
+                <a:hlinkClick r:id="rId3"/>
+              </a:rPr>
+              <a:t>26. SLotH GitHub: SLH-DSA Performance</a:t>
+            </a:r>
+          </a:p>
+          <a:p>
+            <a:pPr>
+              <a:spcBef>
+                <a:spcPts val="0"/>
+              </a:spcBef>
+              <a:spcAft>
+                <a:spcPts val="600"/>
+              </a:spcAft>
+            </a:pPr>
+            <a:r>
+              <a:rPr sz="1200" b="0">
+                <a:solidFill>
+                  <a:srgbClr val="888888"/>
+                </a:solidFill>
+                <a:latin typeface="Liberation Sans"/>
+              </a:rPr>
+              <a:t>Reference implementation and benchmarks for optimised SLH-DSA, targeting hardware acceleration to close the performance gap with lattice-based schemes.</a:t>
+            </a:r>
+          </a:p>
+          <a:p>
+            <a:pPr>
+              <a:spcBef>
+                <a:spcPts val="0"/>
+              </a:spcBef>
+              <a:spcAft>
+                <a:spcPts val="100"/>
+              </a:spcAft>
+            </a:pPr>
+            <a:r>
+              <a:rPr sz="1200" b="1">
+                <a:solidFill>
+                  <a:srgbClr val="F5F0E8"/>
+                </a:solidFill>
+                <a:latin typeface="Liberation Sans"/>
+                <a:hlinkClick r:id="rId4"/>
+              </a:rPr>
+              <a:t>27. Chaincode: Bitcoin Post-Quantum</a:t>
+            </a:r>
+          </a:p>
+          <a:p>
+            <a:pPr>
+              <a:spcBef>
+                <a:spcPts val="0"/>
+              </a:spcBef>
+              <a:spcAft>
+                <a:spcPts val="600"/>
+              </a:spcAft>
+            </a:pPr>
+            <a:r>
+              <a:rPr sz="1200" b="0">
+                <a:solidFill>
+                  <a:srgbClr val="888888"/>
+                </a:solidFill>
+                <a:latin typeface="Liberation Sans"/>
+              </a:rPr>
+              <a:t>Chaincode Labs research paper analysing post-quantum migration strategies for Bitcoin, including signature scheme selection and upgrade paths.</a:t>
+            </a:r>
+          </a:p>
+        </p:txBody>
+      </p:sp>
+    </p:spTree>
+  </p:cSld>
+  <p:clrMapOvr>
+    <a:masterClrMapping/>
+  </p:clrMapOvr>
+</p:sld>
+</file>
+
+<file path=ppt/slides/slide32.xml><?xml version="1.0" encoding="utf-8"?>
+<p:sld xmlns:a="http://schemas.openxmlformats.org/drawingml/2006/main" xmlns:p="http://schemas.openxmlformats.org/presentationml/2006/main" xmlns:r="http://schemas.openxmlformats.org/officeDocument/2006/relationships">
+  <p:cSld>
+    <p:spTree>
+      <p:nvGrpSpPr>
+        <p:cNvPr id="1" name=""/>
+        <p:cNvGrpSpPr/>
+        <p:nvPr/>
+      </p:nvGrpSpPr>
+      <p:grpSpPr/>
+      <p:sp>
+        <p:nvSpPr>
+          <p:cNvPr id="2" name="Rectangle 1"/>
+          <p:cNvSpPr/>
+          <p:nvPr/>
+        </p:nvSpPr>
+        <p:spPr>
+          <a:xfrm>
+            <a:off x="0" y="0"/>
+            <a:ext cx="12191695" cy="6858000"/>
+          </a:xfrm>
+          <a:prstGeom prst="rect">
+            <a:avLst/>
+          </a:prstGeom>
+          <a:solidFill>
+            <a:srgbClr val="000000"/>
+          </a:solidFill>
+          <a:ln>
+            <a:noFill/>
+          </a:ln>
+        </p:spPr>
+        <p:style>
+          <a:lnRef idx="1">
+            <a:schemeClr val="accent1"/>
+          </a:lnRef>
+          <a:fillRef idx="3">
+            <a:schemeClr val="accent1"/>
+          </a:fillRef>
+          <a:effectRef idx="2">
+            <a:schemeClr val="accent1"/>
+          </a:effectRef>
+          <a:fontRef idx="minor">
+            <a:schemeClr val="lt1"/>
+          </a:fontRef>
+        </p:style>
+        <p:txBody>
+          <a:bodyPr rtlCol="0" anchor="ctr"/>
+          <a:lstStyle/>
+          <a:p>
+            <a:pPr algn="ctr"/>
+          </a:p>
+        </p:txBody>
+      </p:sp>
+      <p:pic>
+        <p:nvPicPr>
+          <p:cNvPr id="3" name="Picture 2" descr="bitcoinbushbash-logo.png"/>
+          <p:cNvPicPr>
+            <a:picLocks noChangeAspect="1"/>
+          </p:cNvPicPr>
+          <p:nvPr/>
+        </p:nvPicPr>
+        <p:blipFill>
+          <a:blip r:embed="rId2"/>
+          <a:stretch>
+            <a:fillRect/>
+          </a:stretch>
+        </p:blipFill>
+        <p:spPr>
+          <a:xfrm>
+            <a:off x="10698480" y="109728"/>
+            <a:ext cx="1353312" cy="1353312"/>
+          </a:xfrm>
+          <a:prstGeom prst="rect">
+            <a:avLst/>
+          </a:prstGeom>
+        </p:spPr>
+      </p:pic>
+      <p:sp>
+        <p:nvSpPr>
+          <p:cNvPr id="4" name="TextBox 3"/>
+          <p:cNvSpPr txBox="1"/>
+          <p:nvPr/>
+        </p:nvSpPr>
+        <p:spPr>
+          <a:xfrm>
+            <a:off x="640080" y="6446520"/>
+            <a:ext cx="3657600" cy="228600"/>
+          </a:xfrm>
+          <a:prstGeom prst="rect">
+            <a:avLst/>
+          </a:prstGeom>
+          <a:noFill/>
+        </p:spPr>
+        <p:txBody>
+          <a:bodyPr wrap="none">
+            <a:spAutoFit/>
+          </a:bodyPr>
+          <a:lstStyle/>
+          <a:p>
+            <a:pPr>
+              <a:defRPr sz="900">
+                <a:solidFill>
+                  <a:srgbClr val="888888"/>
+                </a:solidFill>
+                <a:latin typeface="Liberation Sans"/>
+              </a:defRPr>
+            </a:pPr>
+            <a:r>
+              <a:t>bitcoinbushbash.info</a:t>
+            </a:r>
+          </a:p>
+        </p:txBody>
+      </p:sp>
+      <p:sp>
+        <p:nvSpPr>
+          <p:cNvPr id="5" name="TextBox 4"/>
+          <p:cNvSpPr txBox="1"/>
+          <p:nvPr/>
+        </p:nvSpPr>
+        <p:spPr>
+          <a:xfrm>
+            <a:off x="640080" y="228600"/>
+            <a:ext cx="9601200" cy="1005840"/>
+          </a:xfrm>
+          <a:prstGeom prst="rect">
+            <a:avLst/>
+          </a:prstGeom>
+          <a:noFill/>
+        </p:spPr>
+        <p:txBody>
+          <a:bodyPr wrap="none">
+            <a:spAutoFit/>
+          </a:bodyPr>
+          <a:lstStyle/>
+          <a:p>
+            <a:pPr>
+              <a:defRPr sz="4200" b="1">
+                <a:solidFill>
+                  <a:srgbClr val="FFFFFF"/>
+                </a:solidFill>
+                <a:latin typeface="Liberation Sans"/>
+              </a:defRPr>
+            </a:pPr>
+            <a:r>
+              <a:t>References (9/11)</a:t>
+            </a:r>
+          </a:p>
+        </p:txBody>
+      </p:sp>
+      <p:sp>
+        <p:nvSpPr>
+          <p:cNvPr id="6" name="Rectangle 5"/>
+          <p:cNvSpPr/>
+          <p:nvPr/>
+        </p:nvSpPr>
+        <p:spPr>
+          <a:xfrm>
+            <a:off x="640080" y="1234440"/>
+            <a:ext cx="4114800" cy="50292"/>
+          </a:xfrm>
+          <a:prstGeom prst="rect">
+            <a:avLst/>
+          </a:prstGeom>
+          <a:solidFill>
+            <a:srgbClr val="F7931A"/>
+          </a:solidFill>
+          <a:ln>
+            <a:noFill/>
+          </a:ln>
+        </p:spPr>
+        <p:style>
+          <a:lnRef idx="1">
+            <a:schemeClr val="accent1"/>
+          </a:lnRef>
+          <a:fillRef idx="3">
+            <a:schemeClr val="accent1"/>
+          </a:fillRef>
+          <a:effectRef idx="2">
+            <a:schemeClr val="accent1"/>
+          </a:effectRef>
+          <a:fontRef idx="minor">
+            <a:schemeClr val="lt1"/>
+          </a:fontRef>
+        </p:style>
+        <p:txBody>
+          <a:bodyPr rtlCol="0" anchor="ctr"/>
+          <a:lstStyle/>
+          <a:p>
+            <a:pPr algn="ctr"/>
+          </a:p>
+        </p:txBody>
+      </p:sp>
+      <p:sp>
+        <p:nvSpPr>
+          <p:cNvPr id="7" name="TextBox 6"/>
+          <p:cNvSpPr txBox="1"/>
+          <p:nvPr/>
+        </p:nvSpPr>
+        <p:spPr>
+          <a:xfrm>
+            <a:off x="640080" y="1783080"/>
+            <a:ext cx="10972800" cy="4572000"/>
+          </a:xfrm>
+          <a:prstGeom prst="rect">
+            <a:avLst/>
+          </a:prstGeom>
+          <a:noFill/>
+        </p:spPr>
+        <p:txBody>
+          <a:bodyPr wrap="square" lIns="0" rIns="0" tIns="0" bIns="0">
+            <a:spAutoFit/>
+          </a:bodyPr>
+          <a:lstStyle/>
+          <a:p>
+            <a:pPr>
+              <a:spcBef>
+                <a:spcPts val="800"/>
+              </a:spcBef>
+              <a:spcAft>
+                <a:spcPts val="400"/>
+              </a:spcAft>
+              <a:defRPr sz="1800" b="1">
+                <a:solidFill>
+                  <a:srgbClr val="F7931A"/>
+                </a:solidFill>
+                <a:latin typeface="Liberation Sans"/>
+              </a:defRPr>
+            </a:pPr>
+            <a:r>
+              <a:t>Social problem and fixes</a:t>
+            </a:r>
+          </a:p>
+          <a:p>
+            <a:pPr>
+              <a:spcBef>
+                <a:spcPts val="0"/>
+              </a:spcBef>
+              <a:spcAft>
+                <a:spcPts val="100"/>
+              </a:spcAft>
+            </a:pPr>
+            <a:r>
+              <a:rPr sz="1200" b="1">
+                <a:solidFill>
+                  <a:srgbClr val="F5F0E8"/>
+                </a:solidFill>
+                <a:latin typeface="Liberation Sans"/>
+                <a:hlinkClick r:id="rId3"/>
+              </a:rPr>
+              <a:t>28. Hourglass v2 Draft</a:t>
+            </a:r>
+          </a:p>
+          <a:p>
+            <a:pPr>
+              <a:spcBef>
+                <a:spcPts val="0"/>
+              </a:spcBef>
+              <a:spcAft>
+                <a:spcPts val="600"/>
+              </a:spcAft>
+            </a:pPr>
+            <a:r>
+              <a:rPr sz="1200" b="0">
+                <a:solidFill>
+                  <a:srgbClr val="888888"/>
+                </a:solidFill>
+                <a:latin typeface="Liberation Sans"/>
+              </a:rPr>
+              <a:t>Proposes a middle-ground approach to quantum-vulnerable coins: rate-limiting their movement rather than freezing or ignoring them entirely.</a:t>
+            </a:r>
+          </a:p>
+          <a:p>
+            <a:pPr>
+              <a:spcBef>
+                <a:spcPts val="0"/>
+              </a:spcBef>
+              <a:spcAft>
+                <a:spcPts val="100"/>
+              </a:spcAft>
+            </a:pPr>
+            <a:r>
+              <a:rPr sz="1200" b="1">
+                <a:solidFill>
+                  <a:srgbClr val="F5F0E8"/>
+                </a:solidFill>
+                <a:latin typeface="Liberation Sans"/>
+                <a:hlinkClick r:id="rId4"/>
+              </a:rPr>
+              <a:t>29. Lopp: Against Quantum Recovery of Bitcoin</a:t>
+            </a:r>
+          </a:p>
+          <a:p>
+            <a:pPr>
+              <a:spcBef>
+                <a:spcPts val="0"/>
+              </a:spcBef>
+              <a:spcAft>
+                <a:spcPts val="600"/>
+              </a:spcAft>
+            </a:pPr>
+            <a:r>
+              <a:rPr sz="1200" b="0">
+                <a:solidFill>
+                  <a:srgbClr val="888888"/>
+                </a:solidFill>
+                <a:latin typeface="Liberation Sans"/>
+              </a:rPr>
+              <a:t>Jameson Lopp argues Bitcoin should permanently burn funds in quantum-vulnerable addresses rather than allow quantum-capable entities to steal them.</a:t>
+            </a:r>
+          </a:p>
+          <a:p>
+            <a:pPr>
+              <a:spcBef>
+                <a:spcPts val="0"/>
+              </a:spcBef>
+              <a:spcAft>
+                <a:spcPts val="100"/>
+              </a:spcAft>
+            </a:pPr>
+            <a:r>
+              <a:rPr sz="1200" b="1">
+                <a:solidFill>
+                  <a:srgbClr val="F5F0E8"/>
+                </a:solidFill>
+                <a:latin typeface="Liberation Sans"/>
+                <a:hlinkClick r:id="rId5"/>
+              </a:rPr>
+              <a:t>30. CoinDesk: To Freeze or Not to Freeze — Satoshi and the $440B in Bitcoin Threatened by Quantum Computing</a:t>
+            </a:r>
+          </a:p>
+          <a:p>
+            <a:pPr>
+              <a:spcBef>
+                <a:spcPts val="0"/>
+              </a:spcBef>
+              <a:spcAft>
+                <a:spcPts val="600"/>
+              </a:spcAft>
+            </a:pPr>
+            <a:r>
+              <a:rPr sz="1200" b="0">
+                <a:solidFill>
+                  <a:srgbClr val="888888"/>
+                </a:solidFill>
+                <a:latin typeface="Liberation Sans"/>
+              </a:rPr>
+              <a:t>Examines the debate over ~7 million BTC in quantum-vulnerable addresses including Satoshi's ~1 million coins, weighing immutability against market stability.</a:t>
+            </a:r>
+          </a:p>
+          <a:p>
+            <a:pPr>
+              <a:spcBef>
+                <a:spcPts val="0"/>
+              </a:spcBef>
+              <a:spcAft>
+                <a:spcPts val="100"/>
+              </a:spcAft>
+            </a:pPr>
+            <a:r>
+              <a:rPr sz="1200" b="1">
+                <a:solidFill>
+                  <a:srgbClr val="F5F0E8"/>
+                </a:solidFill>
+                <a:latin typeface="Liberation Sans"/>
+                <a:hlinkClick r:id="rId6"/>
+              </a:rPr>
+              <a:t>31. Cointelegraph Magazine: Bitcoin may face hard fork over any attempt to freeze Satoshi's coins</a:t>
+            </a:r>
+          </a:p>
+          <a:p>
+            <a:pPr>
+              <a:spcBef>
+                <a:spcPts val="0"/>
+              </a:spcBef>
+              <a:spcAft>
+                <a:spcPts val="600"/>
+              </a:spcAft>
+            </a:pPr>
+            <a:r>
+              <a:rPr sz="1200" b="0">
+                <a:solidFill>
+                  <a:srgbClr val="888888"/>
+                </a:solidFill>
+                <a:latin typeface="Liberation Sans"/>
+              </a:rPr>
+              <a:t>Argues that freezing quantum-vulnerable coins would violate Bitcoin's core property rights, potentially splitting the network in a contentious hard fork.</a:t>
+            </a:r>
+          </a:p>
+        </p:txBody>
+      </p:sp>
+    </p:spTree>
+  </p:cSld>
+  <p:clrMapOvr>
+    <a:masterClrMapping/>
+  </p:clrMapOvr>
+</p:sld>
+</file>
+
+<file path=ppt/slides/slide33.xml><?xml version="1.0" encoding="utf-8"?>
+<p:sld xmlns:a="http://schemas.openxmlformats.org/drawingml/2006/main" xmlns:p="http://schemas.openxmlformats.org/presentationml/2006/main" xmlns:r="http://schemas.openxmlformats.org/officeDocument/2006/relationships">
+  <p:cSld>
+    <p:spTree>
+      <p:nvGrpSpPr>
+        <p:cNvPr id="1" name=""/>
+        <p:cNvGrpSpPr/>
+        <p:nvPr/>
+      </p:nvGrpSpPr>
+      <p:grpSpPr/>
+      <p:sp>
+        <p:nvSpPr>
+          <p:cNvPr id="2" name="Rectangle 1"/>
+          <p:cNvSpPr/>
+          <p:nvPr/>
+        </p:nvSpPr>
+        <p:spPr>
+          <a:xfrm>
+            <a:off x="0" y="0"/>
+            <a:ext cx="12191695" cy="6858000"/>
+          </a:xfrm>
+          <a:prstGeom prst="rect">
+            <a:avLst/>
+          </a:prstGeom>
+          <a:solidFill>
+            <a:srgbClr val="000000"/>
+          </a:solidFill>
+          <a:ln>
+            <a:noFill/>
+          </a:ln>
+        </p:spPr>
+        <p:style>
+          <a:lnRef idx="1">
+            <a:schemeClr val="accent1"/>
+          </a:lnRef>
+          <a:fillRef idx="3">
+            <a:schemeClr val="accent1"/>
+          </a:fillRef>
+          <a:effectRef idx="2">
+            <a:schemeClr val="accent1"/>
+          </a:effectRef>
+          <a:fontRef idx="minor">
+            <a:schemeClr val="lt1"/>
+          </a:fontRef>
+        </p:style>
+        <p:txBody>
+          <a:bodyPr rtlCol="0" anchor="ctr"/>
+          <a:lstStyle/>
+          <a:p>
+            <a:pPr algn="ctr"/>
+          </a:p>
+        </p:txBody>
+      </p:sp>
+      <p:pic>
+        <p:nvPicPr>
+          <p:cNvPr id="3" name="Picture 2" descr="bitcoinbushbash-logo.png"/>
+          <p:cNvPicPr>
+            <a:picLocks noChangeAspect="1"/>
+          </p:cNvPicPr>
+          <p:nvPr/>
+        </p:nvPicPr>
+        <p:blipFill>
+          <a:blip r:embed="rId2"/>
+          <a:stretch>
+            <a:fillRect/>
+          </a:stretch>
+        </p:blipFill>
+        <p:spPr>
+          <a:xfrm>
+            <a:off x="10698480" y="109728"/>
+            <a:ext cx="1353312" cy="1353312"/>
+          </a:xfrm>
+          <a:prstGeom prst="rect">
+            <a:avLst/>
+          </a:prstGeom>
+        </p:spPr>
+      </p:pic>
+      <p:sp>
+        <p:nvSpPr>
+          <p:cNvPr id="4" name="TextBox 3"/>
+          <p:cNvSpPr txBox="1"/>
+          <p:nvPr/>
+        </p:nvSpPr>
+        <p:spPr>
+          <a:xfrm>
+            <a:off x="640080" y="6446520"/>
+            <a:ext cx="3657600" cy="228600"/>
+          </a:xfrm>
+          <a:prstGeom prst="rect">
+            <a:avLst/>
+          </a:prstGeom>
+          <a:noFill/>
+        </p:spPr>
+        <p:txBody>
+          <a:bodyPr wrap="none">
+            <a:spAutoFit/>
+          </a:bodyPr>
+          <a:lstStyle/>
+          <a:p>
+            <a:pPr>
+              <a:defRPr sz="900">
+                <a:solidFill>
+                  <a:srgbClr val="888888"/>
+                </a:solidFill>
+                <a:latin typeface="Liberation Sans"/>
+              </a:defRPr>
+            </a:pPr>
+            <a:r>
+              <a:t>bitcoinbushbash.info</a:t>
+            </a:r>
+          </a:p>
+        </p:txBody>
+      </p:sp>
+      <p:sp>
+        <p:nvSpPr>
+          <p:cNvPr id="5" name="TextBox 4"/>
+          <p:cNvSpPr txBox="1"/>
+          <p:nvPr/>
+        </p:nvSpPr>
+        <p:spPr>
+          <a:xfrm>
+            <a:off x="640080" y="228600"/>
+            <a:ext cx="9601200" cy="1005840"/>
+          </a:xfrm>
+          <a:prstGeom prst="rect">
+            <a:avLst/>
+          </a:prstGeom>
+          <a:noFill/>
+        </p:spPr>
+        <p:txBody>
+          <a:bodyPr wrap="none">
+            <a:spAutoFit/>
+          </a:bodyPr>
+          <a:lstStyle/>
+          <a:p>
+            <a:pPr>
+              <a:defRPr sz="4200" b="1">
+                <a:solidFill>
+                  <a:srgbClr val="FFFFFF"/>
+                </a:solidFill>
+                <a:latin typeface="Liberation Sans"/>
+              </a:defRPr>
+            </a:pPr>
+            <a:r>
+              <a:t>References (10/11)</a:t>
+            </a:r>
+          </a:p>
+        </p:txBody>
+      </p:sp>
+      <p:sp>
+        <p:nvSpPr>
+          <p:cNvPr id="6" name="Rectangle 5"/>
+          <p:cNvSpPr/>
+          <p:nvPr/>
+        </p:nvSpPr>
+        <p:spPr>
+          <a:xfrm>
+            <a:off x="640080" y="1234440"/>
+            <a:ext cx="4114800" cy="50292"/>
+          </a:xfrm>
+          <a:prstGeom prst="rect">
+            <a:avLst/>
+          </a:prstGeom>
+          <a:solidFill>
+            <a:srgbClr val="F7931A"/>
+          </a:solidFill>
+          <a:ln>
+            <a:noFill/>
+          </a:ln>
+        </p:spPr>
+        <p:style>
+          <a:lnRef idx="1">
+            <a:schemeClr val="accent1"/>
+          </a:lnRef>
+          <a:fillRef idx="3">
+            <a:schemeClr val="accent1"/>
+          </a:fillRef>
+          <a:effectRef idx="2">
+            <a:schemeClr val="accent1"/>
+          </a:effectRef>
+          <a:fontRef idx="minor">
+            <a:schemeClr val="lt1"/>
+          </a:fontRef>
+        </p:style>
+        <p:txBody>
+          <a:bodyPr rtlCol="0" anchor="ctr"/>
+          <a:lstStyle/>
+          <a:p>
+            <a:pPr algn="ctr"/>
+          </a:p>
+        </p:txBody>
+      </p:sp>
+      <p:sp>
+        <p:nvSpPr>
+          <p:cNvPr id="7" name="TextBox 6"/>
+          <p:cNvSpPr txBox="1"/>
+          <p:nvPr/>
+        </p:nvSpPr>
+        <p:spPr>
+          <a:xfrm>
+            <a:off x="640080" y="1783080"/>
+            <a:ext cx="10972800" cy="4572000"/>
+          </a:xfrm>
+          <a:prstGeom prst="rect">
+            <a:avLst/>
+          </a:prstGeom>
+          <a:noFill/>
+        </p:spPr>
+        <p:txBody>
+          <a:bodyPr wrap="square" lIns="0" rIns="0" tIns="0" bIns="0">
+            <a:spAutoFit/>
+          </a:bodyPr>
+          <a:lstStyle/>
+          <a:p>
+            <a:pPr>
+              <a:spcBef>
+                <a:spcPts val="800"/>
+              </a:spcBef>
+              <a:spcAft>
+                <a:spcPts val="400"/>
+              </a:spcAft>
+              <a:defRPr sz="1800" b="1">
+                <a:solidFill>
+                  <a:srgbClr val="F7931A"/>
+                </a:solidFill>
+                <a:latin typeface="Liberation Sans"/>
+              </a:defRPr>
+            </a:pPr>
+            <a:r>
+              <a:t>Other uses of QC</a:t>
+            </a:r>
+          </a:p>
+          <a:p>
+            <a:pPr>
+              <a:spcBef>
+                <a:spcPts val="0"/>
+              </a:spcBef>
+              <a:spcAft>
+                <a:spcPts val="100"/>
+              </a:spcAft>
+            </a:pPr>
+            <a:r>
+              <a:rPr sz="1200" b="1">
+                <a:solidFill>
+                  <a:srgbClr val="F5F0E8"/>
+                </a:solidFill>
+                <a:latin typeface="Liberation Sans"/>
+                <a:hlinkClick r:id="rId3"/>
+              </a:rPr>
+              <a:t>32. Frontiers: Quantum Computing — Foundations, Algorithms, and Emerging Applications (2025)</a:t>
+            </a:r>
+          </a:p>
+          <a:p>
+            <a:pPr>
+              <a:spcBef>
+                <a:spcPts val="0"/>
+              </a:spcBef>
+              <a:spcAft>
+                <a:spcPts val="600"/>
+              </a:spcAft>
+            </a:pPr>
+            <a:r>
+              <a:rPr sz="1200" b="0">
+                <a:solidFill>
+                  <a:srgbClr val="888888"/>
+                </a:solidFill>
+                <a:latin typeface="Liberation Sans"/>
+              </a:rPr>
+              <a:t>Comprehensive review covering quantum algorithms and their emerging applications across materials science, chemistry, optimisation, and physics simulation.</a:t>
+            </a:r>
+          </a:p>
+          <a:p>
+            <a:pPr>
+              <a:spcBef>
+                <a:spcPts val="0"/>
+              </a:spcBef>
+              <a:spcAft>
+                <a:spcPts val="100"/>
+              </a:spcAft>
+            </a:pPr>
+            <a:r>
+              <a:rPr sz="1200" b="1">
+                <a:solidFill>
+                  <a:srgbClr val="F5F0E8"/>
+                </a:solidFill>
+                <a:latin typeface="Liberation Sans"/>
+                <a:hlinkClick r:id="rId4"/>
+              </a:rPr>
+              <a:t>33. Wikipedia: Harvest Now, Decrypt Later</a:t>
+            </a:r>
+          </a:p>
+          <a:p>
+            <a:pPr>
+              <a:spcBef>
+                <a:spcPts val="0"/>
+              </a:spcBef>
+              <a:spcAft>
+                <a:spcPts val="600"/>
+              </a:spcAft>
+            </a:pPr>
+            <a:r>
+              <a:rPr sz="1200" b="0">
+                <a:solidFill>
+                  <a:srgbClr val="888888"/>
+                </a:solidFill>
+                <a:latin typeface="Liberation Sans"/>
+              </a:rPr>
+              <a:t>Overview of the HNDL strategy where adversaries intercept and store encrypted communications today for decryption once quantum computers become available.</a:t>
+            </a:r>
+          </a:p>
+        </p:txBody>
+      </p:sp>
+    </p:spTree>
+  </p:cSld>
+  <p:clrMapOvr>
+    <a:masterClrMapping/>
+  </p:clrMapOvr>
+</p:sld>
+</file>
+
+<file path=ppt/slides/slide34.xml><?xml version="1.0" encoding="utf-8"?>
+<p:sld xmlns:a="http://schemas.openxmlformats.org/drawingml/2006/main" xmlns:p="http://schemas.openxmlformats.org/presentationml/2006/main" xmlns:r="http://schemas.openxmlformats.org/officeDocument/2006/relationships">
+  <p:cSld>
+    <p:spTree>
+      <p:nvGrpSpPr>
+        <p:cNvPr id="1" name=""/>
+        <p:cNvGrpSpPr/>
+        <p:nvPr/>
+      </p:nvGrpSpPr>
+      <p:grpSpPr/>
+      <p:sp>
+        <p:nvSpPr>
+          <p:cNvPr id="2" name="Rectangle 1"/>
+          <p:cNvSpPr/>
+          <p:nvPr/>
+        </p:nvSpPr>
+        <p:spPr>
+          <a:xfrm>
+            <a:off x="0" y="0"/>
+            <a:ext cx="12191695" cy="6858000"/>
+          </a:xfrm>
+          <a:prstGeom prst="rect">
+            <a:avLst/>
+          </a:prstGeom>
+          <a:solidFill>
+            <a:srgbClr val="000000"/>
+          </a:solidFill>
+          <a:ln>
+            <a:noFill/>
+          </a:ln>
+        </p:spPr>
+        <p:style>
+          <a:lnRef idx="1">
+            <a:schemeClr val="accent1"/>
+          </a:lnRef>
+          <a:fillRef idx="3">
+            <a:schemeClr val="accent1"/>
+          </a:fillRef>
+          <a:effectRef idx="2">
+            <a:schemeClr val="accent1"/>
+          </a:effectRef>
+          <a:fontRef idx="minor">
+            <a:schemeClr val="lt1"/>
+          </a:fontRef>
+        </p:style>
+        <p:txBody>
+          <a:bodyPr rtlCol="0" anchor="ctr"/>
+          <a:lstStyle/>
+          <a:p>
+            <a:pPr algn="ctr"/>
+          </a:p>
+        </p:txBody>
+      </p:sp>
+      <p:pic>
+        <p:nvPicPr>
+          <p:cNvPr id="3" name="Picture 2" descr="bitcoinbushbash-logo.png"/>
+          <p:cNvPicPr>
+            <a:picLocks noChangeAspect="1"/>
+          </p:cNvPicPr>
+          <p:nvPr/>
+        </p:nvPicPr>
+        <p:blipFill>
+          <a:blip r:embed="rId2"/>
+          <a:stretch>
+            <a:fillRect/>
+          </a:stretch>
+        </p:blipFill>
+        <p:spPr>
+          <a:xfrm>
+            <a:off x="10698480" y="109728"/>
+            <a:ext cx="1353312" cy="1353312"/>
+          </a:xfrm>
+          <a:prstGeom prst="rect">
+            <a:avLst/>
+          </a:prstGeom>
+        </p:spPr>
+      </p:pic>
+      <p:sp>
+        <p:nvSpPr>
+          <p:cNvPr id="4" name="TextBox 3"/>
+          <p:cNvSpPr txBox="1"/>
+          <p:nvPr/>
+        </p:nvSpPr>
+        <p:spPr>
+          <a:xfrm>
+            <a:off x="640080" y="6446520"/>
+            <a:ext cx="3657600" cy="228600"/>
+          </a:xfrm>
+          <a:prstGeom prst="rect">
+            <a:avLst/>
+          </a:prstGeom>
+          <a:noFill/>
+        </p:spPr>
+        <p:txBody>
+          <a:bodyPr wrap="none">
+            <a:spAutoFit/>
+          </a:bodyPr>
+          <a:lstStyle/>
+          <a:p>
+            <a:pPr>
+              <a:defRPr sz="900">
+                <a:solidFill>
+                  <a:srgbClr val="888888"/>
+                </a:solidFill>
+                <a:latin typeface="Liberation Sans"/>
+              </a:defRPr>
+            </a:pPr>
+            <a:r>
+              <a:t>bitcoinbushbash.info</a:t>
+            </a:r>
+          </a:p>
+        </p:txBody>
+      </p:sp>
+      <p:sp>
+        <p:nvSpPr>
+          <p:cNvPr id="5" name="TextBox 4"/>
+          <p:cNvSpPr txBox="1"/>
+          <p:nvPr/>
+        </p:nvSpPr>
+        <p:spPr>
+          <a:xfrm>
+            <a:off x="640080" y="228600"/>
+            <a:ext cx="9601200" cy="1005840"/>
+          </a:xfrm>
+          <a:prstGeom prst="rect">
+            <a:avLst/>
+          </a:prstGeom>
+          <a:noFill/>
+        </p:spPr>
+        <p:txBody>
+          <a:bodyPr wrap="none">
+            <a:spAutoFit/>
+          </a:bodyPr>
+          <a:lstStyle/>
+          <a:p>
+            <a:pPr>
+              <a:defRPr sz="4200" b="1">
+                <a:solidFill>
+                  <a:srgbClr val="FFFFFF"/>
+                </a:solidFill>
+                <a:latin typeface="Liberation Sans"/>
+              </a:defRPr>
+            </a:pPr>
+            <a:r>
+              <a:t>References (11/11)</a:t>
+            </a:r>
+          </a:p>
+        </p:txBody>
+      </p:sp>
+      <p:sp>
+        <p:nvSpPr>
+          <p:cNvPr id="6" name="Rectangle 5"/>
+          <p:cNvSpPr/>
+          <p:nvPr/>
+        </p:nvSpPr>
+        <p:spPr>
+          <a:xfrm>
+            <a:off x="640080" y="1234440"/>
+            <a:ext cx="4114800" cy="50292"/>
+          </a:xfrm>
+          <a:prstGeom prst="rect">
+            <a:avLst/>
+          </a:prstGeom>
+          <a:solidFill>
+            <a:srgbClr val="F7931A"/>
+          </a:solidFill>
+          <a:ln>
+            <a:noFill/>
+          </a:ln>
+        </p:spPr>
+        <p:style>
+          <a:lnRef idx="1">
+            <a:schemeClr val="accent1"/>
+          </a:lnRef>
+          <a:fillRef idx="3">
+            <a:schemeClr val="accent1"/>
+          </a:fillRef>
+          <a:effectRef idx="2">
+            <a:schemeClr val="accent1"/>
+          </a:effectRef>
+          <a:fontRef idx="minor">
+            <a:schemeClr val="lt1"/>
+          </a:fontRef>
+        </p:style>
+        <p:txBody>
+          <a:bodyPr rtlCol="0" anchor="ctr"/>
+          <a:lstStyle/>
+          <a:p>
+            <a:pPr algn="ctr"/>
+          </a:p>
+        </p:txBody>
+      </p:sp>
+      <p:sp>
+        <p:nvSpPr>
+          <p:cNvPr id="7" name="TextBox 6"/>
+          <p:cNvSpPr txBox="1"/>
+          <p:nvPr/>
+        </p:nvSpPr>
+        <p:spPr>
+          <a:xfrm>
+            <a:off x="640080" y="1783080"/>
+            <a:ext cx="10972800" cy="4572000"/>
+          </a:xfrm>
+          <a:prstGeom prst="rect">
+            <a:avLst/>
+          </a:prstGeom>
+          <a:noFill/>
+        </p:spPr>
+        <p:txBody>
+          <a:bodyPr wrap="square" lIns="0" rIns="0" tIns="0" bIns="0">
+            <a:spAutoFit/>
+          </a:bodyPr>
+          <a:lstStyle/>
+          <a:p>
+            <a:pPr>
+              <a:spcBef>
+                <a:spcPts val="0"/>
+              </a:spcBef>
+              <a:spcAft>
+                <a:spcPts val="100"/>
+              </a:spcAft>
+            </a:pPr>
+            <a:r>
+              <a:rPr sz="1200" b="1">
+                <a:solidFill>
+                  <a:srgbClr val="F5F0E8"/>
+                </a:solidFill>
+                <a:latin typeface="Liberation Sans"/>
+                <a:hlinkClick r:id="rId3"/>
+              </a:rPr>
+              <a:t>34. Federal Reserve: HNDL and Post-Quantum Cryptography Risks for Distributed Ledger Networks</a:t>
+            </a:r>
+          </a:p>
+          <a:p>
+            <a:pPr>
+              <a:spcBef>
+                <a:spcPts val="0"/>
+              </a:spcBef>
+              <a:spcAft>
+                <a:spcPts val="600"/>
+              </a:spcAft>
+            </a:pPr>
+            <a:r>
+              <a:rPr sz="1200" b="0">
+                <a:solidFill>
+                  <a:srgbClr val="888888"/>
+                </a:solidFill>
+                <a:latin typeface="Liberation Sans"/>
+              </a:rPr>
+              <a:t>Federal Reserve research examining how harvest-now-decrypt-later attacks pose data privacy risks specifically for blockchain and distributed ledger networks.</a:t>
+            </a:r>
+          </a:p>
+          <a:p>
+            <a:pPr>
+              <a:spcBef>
+                <a:spcPts val="0"/>
+              </a:spcBef>
+              <a:spcAft>
+                <a:spcPts val="100"/>
+              </a:spcAft>
+            </a:pPr>
+            <a:r>
+              <a:rPr sz="1200" b="1">
+                <a:solidFill>
+                  <a:srgbClr val="F5F0E8"/>
+                </a:solidFill>
+                <a:latin typeface="Liberation Sans"/>
+                <a:hlinkClick r:id="rId4"/>
+              </a:rPr>
+              <a:t>35. McKinsey: The Quantum Revolution in Pharma (2025)</a:t>
+            </a:r>
+          </a:p>
+          <a:p>
+            <a:pPr>
+              <a:spcBef>
+                <a:spcPts val="0"/>
+              </a:spcBef>
+              <a:spcAft>
+                <a:spcPts val="600"/>
+              </a:spcAft>
+            </a:pPr>
+            <a:r>
+              <a:rPr sz="1200" b="0">
+                <a:solidFill>
+                  <a:srgbClr val="888888"/>
+                </a:solidFill>
+                <a:latin typeface="Liberation Sans"/>
+              </a:rPr>
+              <a:t>McKinsey analysis of how quantum computing is accelerating drug discovery by simulating molecular interactions at the quantum level, compressing timelines from years to weeks.</a:t>
+            </a:r>
+          </a:p>
+          <a:p>
+            <a:pPr>
+              <a:spcBef>
+                <a:spcPts val="0"/>
+              </a:spcBef>
+              <a:spcAft>
+                <a:spcPts val="100"/>
+              </a:spcAft>
+            </a:pPr>
+            <a:r>
+              <a:rPr sz="1200" b="1">
+                <a:solidFill>
+                  <a:srgbClr val="F5F0E8"/>
+                </a:solidFill>
+                <a:latin typeface="Liberation Sans"/>
+                <a:hlinkClick r:id="rId5"/>
+              </a:rPr>
+              <a:t>36. Nature: Quantum-Machine-Assisted Drug Discovery (2025)</a:t>
+            </a:r>
+          </a:p>
+          <a:p>
+            <a:pPr>
+              <a:spcBef>
+                <a:spcPts val="0"/>
+              </a:spcBef>
+              <a:spcAft>
+                <a:spcPts val="600"/>
+              </a:spcAft>
+            </a:pPr>
+            <a:r>
+              <a:rPr sz="1200" b="0">
+                <a:solidFill>
+                  <a:srgbClr val="888888"/>
+                </a:solidFill>
+                <a:latin typeface="Liberation Sans"/>
+              </a:rPr>
+              <a:t>Nature paper on combining quantum computing with machine learning for biomarker discovery, genomic data processing, and cancer detection via liquid biopsy.</a:t>
+            </a:r>
+          </a:p>
+        </p:txBody>
+      </p:sp>
+    </p:spTree>
+  </p:cSld>
+  <p:clrMapOvr>
+    <a:masterClrMapping/>
+  </p:clrMapOvr>
+</p:sld>
+</file>
+
+<file path=ppt/slides/slide35.xml><?xml version="1.0" encoding="utf-8"?>
+<p:sld xmlns:a="http://schemas.openxmlformats.org/drawingml/2006/main" xmlns:p="http://schemas.openxmlformats.org/presentationml/2006/main" xmlns:r="http://schemas.openxmlformats.org/officeDocument/2006/relationships">
+  <p:cSld>
+    <p:spTree>
+      <p:nvGrpSpPr>
+        <p:cNvPr id="1" name=""/>
+        <p:cNvGrpSpPr/>
+        <p:nvPr/>
+      </p:nvGrpSpPr>
+      <p:grpSpPr/>
+      <p:sp>
+        <p:nvSpPr>
+          <p:cNvPr id="2" name="Rectangle 1"/>
+          <p:cNvSpPr/>
+          <p:nvPr/>
+        </p:nvSpPr>
+        <p:spPr>
+          <a:xfrm>
+            <a:off x="0" y="0"/>
+            <a:ext cx="12191695" cy="6858000"/>
+          </a:xfrm>
+          <a:prstGeom prst="rect">
+            <a:avLst/>
+          </a:prstGeom>
+          <a:solidFill>
+            <a:srgbClr val="000000"/>
+          </a:solidFill>
+          <a:ln>
+            <a:noFill/>
+          </a:ln>
+        </p:spPr>
+        <p:style>
+          <a:lnRef idx="1">
+            <a:schemeClr val="accent1"/>
+          </a:lnRef>
+          <a:fillRef idx="3">
+            <a:schemeClr val="accent1"/>
+          </a:fillRef>
+          <a:effectRef idx="2">
+            <a:schemeClr val="accent1"/>
+          </a:effectRef>
+          <a:fontRef idx="minor">
+            <a:schemeClr val="lt1"/>
+          </a:fontRef>
+        </p:style>
+        <p:txBody>
+          <a:bodyPr rtlCol="0" anchor="ctr"/>
+          <a:lstStyle/>
+          <a:p>
+            <a:pPr algn="ctr"/>
+          </a:p>
+        </p:txBody>
+      </p:sp>
+      <p:pic>
+        <p:nvPicPr>
+          <p:cNvPr id="3" name="Picture 2" descr="bitcoinbushbash-logo.png"/>
+          <p:cNvPicPr>
+            <a:picLocks noChangeAspect="1"/>
+          </p:cNvPicPr>
+          <p:nvPr/>
+        </p:nvPicPr>
+        <p:blipFill>
+          <a:blip r:embed="rId2"/>
+          <a:stretch>
+            <a:fillRect/>
+          </a:stretch>
+        </p:blipFill>
+        <p:spPr>
+          <a:xfrm>
+            <a:off x="10698480" y="109728"/>
+            <a:ext cx="1353312" cy="1353312"/>
+          </a:xfrm>
+          <a:prstGeom prst="rect">
+            <a:avLst/>
+          </a:prstGeom>
+        </p:spPr>
+      </p:pic>
+      <p:sp>
+        <p:nvSpPr>
+          <p:cNvPr id="4" name="TextBox 3"/>
+          <p:cNvSpPr txBox="1"/>
+          <p:nvPr/>
+        </p:nvSpPr>
+        <p:spPr>
+          <a:xfrm>
+            <a:off x="640080" y="6446520"/>
+            <a:ext cx="3657600" cy="228600"/>
+          </a:xfrm>
+          <a:prstGeom prst="rect">
+            <a:avLst/>
+          </a:prstGeom>
+          <a:noFill/>
+        </p:spPr>
+        <p:txBody>
+          <a:bodyPr wrap="none">
+            <a:spAutoFit/>
+          </a:bodyPr>
+          <a:lstStyle/>
+          <a:p>
+            <a:pPr>
+              <a:defRPr sz="900">
+                <a:solidFill>
+                  <a:srgbClr val="888888"/>
+                </a:solidFill>
+                <a:latin typeface="Liberation Sans"/>
+              </a:defRPr>
+            </a:pPr>
+            <a:r>
+              <a:t>bitcoinbushbash.info</a:t>
+            </a:r>
+          </a:p>
+        </p:txBody>
+      </p:sp>
+      <p:sp>
+        <p:nvSpPr>
+          <p:cNvPr id="5" name="TextBox 4"/>
+          <p:cNvSpPr txBox="1"/>
+          <p:nvPr/>
+        </p:nvSpPr>
+        <p:spPr>
+          <a:xfrm>
+            <a:off x="640080" y="228600"/>
+            <a:ext cx="9601200" cy="1005840"/>
+          </a:xfrm>
+          <a:prstGeom prst="rect">
+            <a:avLst/>
+          </a:prstGeom>
+          <a:noFill/>
+        </p:spPr>
+        <p:txBody>
+          <a:bodyPr wrap="none">
+            <a:spAutoFit/>
+          </a:bodyPr>
+          <a:lstStyle/>
+          <a:p>
+            <a:pPr>
+              <a:defRPr sz="4200" b="1">
+                <a:solidFill>
+                  <a:srgbClr val="FFFFFF"/>
+                </a:solidFill>
+                <a:latin typeface="Liberation Sans"/>
+              </a:defRPr>
+            </a:pPr>
+            <a:r>
+              <a:t>Questions?</a:t>
+            </a:r>
+          </a:p>
+        </p:txBody>
+      </p:sp>
+      <p:sp>
+        <p:nvSpPr>
+          <p:cNvPr id="6" name="Rectangle 5"/>
+          <p:cNvSpPr/>
+          <p:nvPr/>
+        </p:nvSpPr>
+        <p:spPr>
+          <a:xfrm>
+            <a:off x="640080" y="1234440"/>
+            <a:ext cx="4114800" cy="50292"/>
+          </a:xfrm>
+          <a:prstGeom prst="rect">
+            <a:avLst/>
+          </a:prstGeom>
+          <a:solidFill>
+            <a:srgbClr val="F7931A"/>
+          </a:solidFill>
+          <a:ln>
+            <a:noFill/>
+          </a:ln>
+        </p:spPr>
+        <p:style>
+          <a:lnRef idx="1">
+            <a:schemeClr val="accent1"/>
+          </a:lnRef>
+          <a:fillRef idx="3">
+            <a:schemeClr val="accent1"/>
+          </a:fillRef>
+          <a:effectRef idx="2">
+            <a:schemeClr val="accent1"/>
+          </a:effectRef>
+          <a:fontRef idx="minor">
+            <a:schemeClr val="lt1"/>
+          </a:fontRef>
+        </p:style>
+        <p:txBody>
+          <a:bodyPr rtlCol="0" anchor="ctr"/>
+          <a:lstStyle/>
+          <a:p>
+            <a:pPr algn="ctr"/>
+          </a:p>
+        </p:txBody>
+      </p:sp>
+      <p:sp>
+        <p:nvSpPr>
+          <p:cNvPr id="7" name="TextBox 6"/>
+          <p:cNvSpPr txBox="1"/>
+          <p:nvPr/>
+        </p:nvSpPr>
+        <p:spPr>
+          <a:xfrm>
+            <a:off x="640080" y="1371600"/>
+            <a:ext cx="9601200" cy="411480"/>
+          </a:xfrm>
+          <a:prstGeom prst="rect">
+            <a:avLst/>
+          </a:prstGeom>
+          <a:noFill/>
+        </p:spPr>
+        <p:txBody>
+          <a:bodyPr wrap="none">
+            <a:spAutoFit/>
+          </a:bodyPr>
+          <a:lstStyle/>
+          <a:p>
+            <a:pPr>
+              <a:defRPr sz="1700">
+                <a:solidFill>
+                  <a:srgbClr val="F4C27A"/>
+                </a:solidFill>
+                <a:latin typeface="Liberation Sans"/>
+              </a:defRPr>
+            </a:pPr>
+            <a:r>
+              <a:t>Where should Bitcoin move first?</a:t>
+            </a:r>
+          </a:p>
+        </p:txBody>
+      </p:sp>
+      <p:sp>
+        <p:nvSpPr>
+          <p:cNvPr id="8" name="TextBox 7"/>
+          <p:cNvSpPr txBox="1"/>
+          <p:nvPr/>
+        </p:nvSpPr>
+        <p:spPr>
+          <a:xfrm>
+            <a:off x="640080" y="2377440"/>
+            <a:ext cx="10058400" cy="4114800"/>
+          </a:xfrm>
+          <a:prstGeom prst="rect">
+            <a:avLst/>
+          </a:prstGeom>
+          <a:noFill/>
+        </p:spPr>
+        <p:txBody>
+          <a:bodyPr wrap="square">
+            <a:spAutoFit/>
+          </a:bodyPr>
+          <a:lstStyle/>
+          <a:p>
+            <a:pPr>
+              <a:spcAft>
+                <a:spcPts val="1200"/>
+              </a:spcAft>
+              <a:defRPr sz="3000" b="1">
+                <a:solidFill>
+                  <a:srgbClr val="F5F0E8"/>
+                </a:solidFill>
+                <a:latin typeface="Liberation Sans"/>
+              </a:defRPr>
+            </a:pPr>
+            <a:r>
+              <a:t>Priority 1:  stop exposing public keys</a:t>
+            </a:r>
+          </a:p>
+          <a:p>
+            <a:pPr>
+              <a:spcAft>
+                <a:spcPts val="1200"/>
+              </a:spcAft>
+              <a:defRPr sz="3000" b="1">
+                <a:solidFill>
+                  <a:srgbClr val="F5F0E8"/>
+                </a:solidFill>
+                <a:latin typeface="Liberation Sans"/>
+              </a:defRPr>
+            </a:pPr>
+            <a:r>
+              <a:t>Priority 2:  safe upgrade path (BIP-360)</a:t>
+            </a:r>
+          </a:p>
+          <a:p>
+            <a:pPr>
+              <a:spcAft>
+                <a:spcPts val="1200"/>
+              </a:spcAft>
+              <a:defRPr sz="3000" b="1">
+                <a:solidFill>
+                  <a:srgbClr val="F5F0E8"/>
+                </a:solidFill>
+                <a:latin typeface="Liberation Sans"/>
+              </a:defRPr>
+            </a:pPr>
+            <a:r>
+              <a:t>Priority 3:  social consensus on legacy coins</a:t>
             </a:r>
           </a:p>
         </p:txBody>
